--- a/courses/learn_floorplanning/module04-01-hierarchical-floorplan/slides.pptx
+++ b/courses/learn_floorplanning/module04-01-hierarchical-floorplan/slides.pptx
@@ -11,6 +11,10 @@
     <p:sldId id="259" r:id="rId11"/>
     <p:sldId id="260" r:id="rId12"/>
     <p:sldId id="261" r:id="rId13"/>
+    <p:sldId id="262" r:id="rId14"/>
+    <p:sldId id="263" r:id="rId15"/>
+    <p:sldId id="264" r:id="rId16"/>
+    <p:sldId id="265" r:id="rId17"/>
   </p:sldIdLst>
   <p:sldSz cx="12191695" cy="6858000" type="screen4x3"/>
   <p:notesSz cx="6858000" cy="9144000"/>
@@ -507,7 +511,83 @@
           <a:lstStyle/>
           <a:p>
             <a:r>
-              <a:t>Large designs floorplan recursively: clusters become soft or hard regions, each with its own sub-floorplan, then compose into the chip outline. Hierarchy reuses the same packing ideas at every level and mirrors how partitioning and clustering fed you the blocks.</a:t>
+              <a:t>Hierarchy packs cluster AB on the left and cluster CDE on the right with x offset five. Local pack, then place clusters—legal overall with clusters separated in x.</a:t>
+            </a:r>
+          </a:p>
+          <a:p/>
+          <a:p>
+            <a:r>
+              <a:t>&lt;!-- algorithm-walkthrough --&gt;</a:t>
+            </a:r>
+          </a:p>
+        </p:txBody>
+      </p:sp>
+      <p:sp>
+        <p:nvSpPr>
+          <p:cNvPr id="4" name="Slide Number Placeholder 3"/>
+          <p:cNvSpPr>
+            <a:spLocks noGrp="1"/>
+          </p:cNvSpPr>
+          <p:nvPr>
+            <p:ph type="sldNum" idx="5" sz="quarter"/>
+          </p:nvPr>
+        </p:nvSpPr>
+        <p:spPr/>
+      </p:sp>
+    </p:spTree>
+  </p:cSld>
+  <p:clrMapOvr>
+    <a:masterClrMapping/>
+  </p:clrMapOvr>
+</p:notes>
+</file>
+
+<file path=ppt/notesSlides/notesSlide10.xml><?xml version="1.0" encoding="utf-8"?>
+<p:notes xmlns:a="http://schemas.openxmlformats.org/drawingml/2006/main" xmlns:p="http://schemas.openxmlformats.org/presentationml/2006/main" xmlns:r="http://schemas.openxmlformats.org/officeDocument/2006/relationships">
+  <p:cSld>
+    <p:spTree>
+      <p:nvGrpSpPr>
+        <p:cNvPr id="1" name=""/>
+        <p:cNvGrpSpPr/>
+        <p:nvPr/>
+      </p:nvGrpSpPr>
+      <p:grpSpPr>
+        <a:xfrm>
+          <a:off x="0" y="0"/>
+          <a:ext cx="0" cy="0"/>
+          <a:chOff x="0" y="0"/>
+          <a:chExt cx="0" cy="0"/>
+        </a:xfrm>
+      </p:grpSpPr>
+      <p:sp>
+        <p:nvSpPr>
+          <p:cNvPr id="2" name="Slide Image Placeholder 1"/>
+          <p:cNvSpPr>
+            <a:spLocks noGrp="1"/>
+          </p:cNvSpPr>
+          <p:nvPr>
+            <p:ph type="sldImg" idx="2"/>
+          </p:nvPr>
+        </p:nvSpPr>
+        <p:spPr/>
+      </p:sp>
+      <p:sp>
+        <p:nvSpPr>
+          <p:cNvPr id="3" name="Notes Placeholder 2"/>
+          <p:cNvSpPr>
+            <a:spLocks noGrp="1"/>
+          </p:cNvSpPr>
+          <p:nvPr>
+            <p:ph type="body" idx="3" sz="quarter"/>
+          </p:nvPr>
+        </p:nvSpPr>
+        <p:spPr/>
+        <p:txBody>
+          <a:bodyPr/>
+          <a:lstStyle/>
+          <a:p>
+            <a:r>
+              <a:t>Accept the AB | CDE packing. Next: assign pins P0 through P3 on all four outline sides.</a:t>
             </a:r>
           </a:p>
         </p:txBody>
@@ -577,7 +657,7 @@
           <a:lstStyle/>
           <a:p>
             <a:r>
-              <a:t>Pick a parent region inside the outline. Floorplan a subset of modules inside that region as if it were its own fixed outline. Place sibling regions, then recurse. Top-level deadspace still uses the chip outline area; local deadspace can be reported per region. Keep region outlines legal with respect to their parent.</a:t>
+              <a:t>Hierarchy packs locally first. Left cluster holds A and B; right cluster holds C, D, and E. Each cluster is a mini-floorplan.</a:t>
             </a:r>
           </a:p>
         </p:txBody>
@@ -647,7 +727,7 @@
           <a:lstStyle/>
           <a:p>
             <a:r>
-              <a:t>Open **hierarchical-floorplan**. Load a two-level starter: a parent outline and two child groups. Pack inside each child, then place children in the parent. Inspect metrics at both levels. Then implement nested packing in Track A.</a:t>
+              <a:t>AB occupies the left side with A at the origin and B at x equals three. Everything in this cluster stays left of x equals five.</a:t>
             </a:r>
           </a:p>
         </p:txBody>
@@ -717,7 +797,7 @@
           <a:lstStyle/>
           <a:p>
             <a:r>
-              <a:t>Partition A–E into two groups. Floorplan each group into a sub-rectangle, then place those rectangles in the ten-by-eight outline. Verify no group overflows its region and regions don’t overlap. Report global deadspace.</a:t>
+              <a:t>CDE packs in local coordinates, then shifts by five in x. C, D, and E all land at x greater than or equal to five—no cluster overlap.</a:t>
             </a:r>
           </a:p>
         </p:txBody>
@@ -787,7 +867,7 @@
           <a:lstStyle/>
           <a:p>
             <a:r>
-              <a:t>Optimizing children while ignoring parent legality leaves you with beautiful sub-floorplans that don’t compose. Don’t double-count module area across levels. Align coordinates to a single global origin when composing.</a:t>
+              <a:t>Placing the two cluster bounding boxes yields a legal chip packing. Hierarchy scales: recurse inside clusters, then assemble.</a:t>
             </a:r>
           </a:p>
         </p:txBody>
@@ -857,7 +937,223 @@
           <a:lstStyle/>
           <a:p>
             <a:r>
-              <a:t>Ship one hierarchical packing for the tiny instance. Next: assign I/O pins to the chip boundary.</a:t>
+              <a:t>Each level can use slicing, B-star, or SA. The teaching golden is simply AB left and CDE right at offset five.</a:t>
+            </a:r>
+          </a:p>
+          <a:p/>
+          <a:p>
+            <a:r>
+              <a:t>&lt;!-- /algorithm-walkthrough --&gt;</a:t>
+            </a:r>
+          </a:p>
+        </p:txBody>
+      </p:sp>
+      <p:sp>
+        <p:nvSpPr>
+          <p:cNvPr id="4" name="Slide Number Placeholder 3"/>
+          <p:cNvSpPr>
+            <a:spLocks noGrp="1"/>
+          </p:cNvSpPr>
+          <p:nvPr>
+            <p:ph type="sldNum" idx="5" sz="quarter"/>
+          </p:nvPr>
+        </p:nvSpPr>
+        <p:spPr/>
+      </p:sp>
+    </p:spTree>
+  </p:cSld>
+  <p:clrMapOvr>
+    <a:masterClrMapping/>
+  </p:clrMapOvr>
+</p:notes>
+</file>
+
+<file path=ppt/notesSlides/notesSlide7.xml><?xml version="1.0" encoding="utf-8"?>
+<p:notes xmlns:a="http://schemas.openxmlformats.org/drawingml/2006/main" xmlns:p="http://schemas.openxmlformats.org/presentationml/2006/main" xmlns:r="http://schemas.openxmlformats.org/officeDocument/2006/relationships">
+  <p:cSld>
+    <p:spTree>
+      <p:nvGrpSpPr>
+        <p:cNvPr id="1" name=""/>
+        <p:cNvGrpSpPr/>
+        <p:nvPr/>
+      </p:nvGrpSpPr>
+      <p:grpSpPr>
+        <a:xfrm>
+          <a:off x="0" y="0"/>
+          <a:ext cx="0" cy="0"/>
+          <a:chOff x="0" y="0"/>
+          <a:chExt cx="0" cy="0"/>
+        </a:xfrm>
+      </p:grpSpPr>
+      <p:sp>
+        <p:nvSpPr>
+          <p:cNvPr id="2" name="Slide Image Placeholder 1"/>
+          <p:cNvSpPr>
+            <a:spLocks noGrp="1"/>
+          </p:cNvSpPr>
+          <p:nvPr>
+            <p:ph type="sldImg" idx="2"/>
+          </p:nvPr>
+        </p:nvSpPr>
+        <p:spPr/>
+      </p:sp>
+      <p:sp>
+        <p:nvSpPr>
+          <p:cNvPr id="3" name="Notes Placeholder 2"/>
+          <p:cNvSpPr>
+            <a:spLocks noGrp="1"/>
+          </p:cNvSpPr>
+          <p:nvPr>
+            <p:ph type="body" idx="3" sz="quarter"/>
+          </p:nvPr>
+        </p:nvSpPr>
+        <p:spPr/>
+        <p:txBody>
+          <a:bodyPr/>
+          <a:lstStyle/>
+          <a:p>
+            <a:r>
+              <a:t>Open hierarchical-floorplan and Pack hierarchy. Confirm A and B have x less than five, C D E have x at least five, and legality true.</a:t>
+            </a:r>
+          </a:p>
+        </p:txBody>
+      </p:sp>
+      <p:sp>
+        <p:nvSpPr>
+          <p:cNvPr id="4" name="Slide Number Placeholder 3"/>
+          <p:cNvSpPr>
+            <a:spLocks noGrp="1"/>
+          </p:cNvSpPr>
+          <p:nvPr>
+            <p:ph type="sldNum" idx="5" sz="quarter"/>
+          </p:nvPr>
+        </p:nvSpPr>
+        <p:spPr/>
+      </p:sp>
+    </p:spTree>
+  </p:cSld>
+  <p:clrMapOvr>
+    <a:masterClrMapping/>
+  </p:clrMapOvr>
+</p:notes>
+</file>
+
+<file path=ppt/notesSlides/notesSlide8.xml><?xml version="1.0" encoding="utf-8"?>
+<p:notes xmlns:a="http://schemas.openxmlformats.org/drawingml/2006/main" xmlns:p="http://schemas.openxmlformats.org/presentationml/2006/main" xmlns:r="http://schemas.openxmlformats.org/officeDocument/2006/relationships">
+  <p:cSld>
+    <p:spTree>
+      <p:nvGrpSpPr>
+        <p:cNvPr id="1" name=""/>
+        <p:cNvGrpSpPr/>
+        <p:nvPr/>
+      </p:nvGrpSpPr>
+      <p:grpSpPr>
+        <a:xfrm>
+          <a:off x="0" y="0"/>
+          <a:ext cx="0" cy="0"/>
+          <a:chOff x="0" y="0"/>
+          <a:chExt cx="0" cy="0"/>
+        </a:xfrm>
+      </p:grpSpPr>
+      <p:sp>
+        <p:nvSpPr>
+          <p:cNvPr id="2" name="Slide Image Placeholder 1"/>
+          <p:cNvSpPr>
+            <a:spLocks noGrp="1"/>
+          </p:cNvSpPr>
+          <p:nvPr>
+            <p:ph type="sldImg" idx="2"/>
+          </p:nvPr>
+        </p:nvSpPr>
+        <p:spPr/>
+      </p:sp>
+      <p:sp>
+        <p:nvSpPr>
+          <p:cNvPr id="3" name="Notes Placeholder 2"/>
+          <p:cNvSpPr>
+            <a:spLocks noGrp="1"/>
+          </p:cNvSpPr>
+          <p:nvPr>
+            <p:ph type="body" idx="3" sz="quarter"/>
+          </p:nvPr>
+        </p:nvSpPr>
+        <p:spPr/>
+        <p:txBody>
+          <a:bodyPr/>
+          <a:lstStyle/>
+          <a:p>
+            <a:r>
+              <a:t>Implement pack_hierarchical. Assert leftMax x+w is at most rightMin x, five modules present, and legality true.</a:t>
+            </a:r>
+          </a:p>
+        </p:txBody>
+      </p:sp>
+      <p:sp>
+        <p:nvSpPr>
+          <p:cNvPr id="4" name="Slide Number Placeholder 3"/>
+          <p:cNvSpPr>
+            <a:spLocks noGrp="1"/>
+          </p:cNvSpPr>
+          <p:nvPr>
+            <p:ph type="sldNum" idx="5" sz="quarter"/>
+          </p:nvPr>
+        </p:nvSpPr>
+        <p:spPr/>
+      </p:sp>
+    </p:spTree>
+  </p:cSld>
+  <p:clrMapOvr>
+    <a:masterClrMapping/>
+  </p:clrMapOvr>
+</p:notes>
+</file>
+
+<file path=ppt/notesSlides/notesSlide9.xml><?xml version="1.0" encoding="utf-8"?>
+<p:notes xmlns:a="http://schemas.openxmlformats.org/drawingml/2006/main" xmlns:p="http://schemas.openxmlformats.org/presentationml/2006/main" xmlns:r="http://schemas.openxmlformats.org/officeDocument/2006/relationships">
+  <p:cSld>
+    <p:spTree>
+      <p:nvGrpSpPr>
+        <p:cNvPr id="1" name=""/>
+        <p:cNvGrpSpPr/>
+        <p:nvPr/>
+      </p:nvGrpSpPr>
+      <p:grpSpPr>
+        <a:xfrm>
+          <a:off x="0" y="0"/>
+          <a:ext cx="0" cy="0"/>
+          <a:chOff x="0" y="0"/>
+          <a:chExt cx="0" cy="0"/>
+        </a:xfrm>
+      </p:grpSpPr>
+      <p:sp>
+        <p:nvSpPr>
+          <p:cNvPr id="2" name="Slide Image Placeholder 1"/>
+          <p:cNvSpPr>
+            <a:spLocks noGrp="1"/>
+          </p:cNvSpPr>
+          <p:nvPr>
+            <p:ph type="sldImg" idx="2"/>
+          </p:nvPr>
+        </p:nvSpPr>
+        <p:spPr/>
+      </p:sp>
+      <p:sp>
+        <p:nvSpPr>
+          <p:cNvPr id="3" name="Notes Placeholder 2"/>
+          <p:cNvSpPr>
+            <a:spLocks noGrp="1"/>
+          </p:cNvSpPr>
+          <p:nvPr>
+            <p:ph type="body" idx="3" sz="quarter"/>
+          </p:nvPr>
+        </p:nvSpPr>
+        <p:spPr/>
+        <p:txBody>
+          <a:bodyPr/>
+          <a:lstStyle/>
+          <a:p>
+            <a:r>
+              <a:t>Overlapping cluster bounding boxes; forgetting the offset; applying different legality rules at each level.</a:t>
             </a:r>
           </a:p>
         </p:txBody>
@@ -3900,7 +4196,7 @@
                 </a:solidFill>
                 <a:latin typeface="Calibri"/>
               </a:rPr>
-              <a:t>Hierarchical floorplans</a:t>
+              <a:t>Hierarchical floorplanning</a:t>
             </a:r>
           </a:p>
           <a:p>
@@ -3919,7 +4215,7 @@
                 </a:solidFill>
                 <a:latin typeface="Calibri"/>
               </a:rPr>
-              <a:t>Large designs floorplan recursively</a:t>
+              <a:t>Hierarchy packs cluster AB on the left and cluster CDE on the right with x offset five</a:t>
             </a:r>
           </a:p>
         </p:txBody>
@@ -3927,6 +4223,169 @@
       <p:sp>
         <p:nvSpPr>
           <p:cNvPr id="3" name="TextBox 2"/>
+          <p:cNvSpPr txBox="1"/>
+          <p:nvPr/>
+        </p:nvSpPr>
+        <p:spPr>
+          <a:xfrm>
+            <a:off x="548640" y="6355080"/>
+            <a:ext cx="11064240" cy="320040"/>
+          </a:xfrm>
+          <a:prstGeom prst="rect">
+            <a:avLst/>
+          </a:prstGeom>
+          <a:noFill/>
+        </p:spPr>
+        <p:txBody>
+          <a:bodyPr wrap="square">
+            <a:noAutofit/>
+          </a:bodyPr>
+          <a:lstStyle/>
+          <a:p>
+            <a:pPr algn="r">
+              <a:lnSpc>
+                <a:spcPts val="2200"/>
+              </a:lnSpc>
+              <a:defRPr sz="1000" b="0">
+                <a:solidFill>
+                  <a:srgbClr val="666666"/>
+                </a:solidFill>
+                <a:latin typeface="Calibri"/>
+              </a:defRPr>
+            </a:pPr>
+            <a:r>
+              <a:t>learn_floorplanning — 01 hierarchical floorplan</a:t>
+            </a:r>
+          </a:p>
+        </p:txBody>
+      </p:sp>
+    </p:spTree>
+  </p:cSld>
+  <p:clrMapOvr>
+    <a:masterClrMapping/>
+  </p:clrMapOvr>
+</p:sld>
+</file>
+
+<file path=ppt/slides/slide10.xml><?xml version="1.0" encoding="utf-8"?>
+<p:sld xmlns:a="http://schemas.openxmlformats.org/drawingml/2006/main" xmlns:p="http://schemas.openxmlformats.org/presentationml/2006/main" xmlns:r="http://schemas.openxmlformats.org/officeDocument/2006/relationships">
+  <p:cSld>
+    <p:spTree>
+      <p:nvGrpSpPr>
+        <p:cNvPr id="1" name=""/>
+        <p:cNvGrpSpPr/>
+        <p:nvPr/>
+      </p:nvGrpSpPr>
+      <p:grpSpPr/>
+      <p:sp>
+        <p:nvSpPr>
+          <p:cNvPr id="2" name="TextBox 1"/>
+          <p:cNvSpPr txBox="1"/>
+          <p:nvPr/>
+        </p:nvSpPr>
+        <p:spPr>
+          <a:xfrm>
+            <a:off x="548640" y="411480"/>
+            <a:ext cx="11064240" cy="777240"/>
+          </a:xfrm>
+          <a:prstGeom prst="rect">
+            <a:avLst/>
+          </a:prstGeom>
+          <a:noFill/>
+        </p:spPr>
+        <p:txBody>
+          <a:bodyPr wrap="square">
+            <a:noAutofit/>
+          </a:bodyPr>
+          <a:lstStyle/>
+          <a:p>
+            <a:pPr>
+              <a:lnSpc>
+                <a:spcPts val="2200"/>
+              </a:lnSpc>
+            </a:pPr>
+            <a:r>
+              <a:rPr sz="2800" b="1">
+                <a:solidFill>
+                  <a:srgbClr val="1A1A2E"/>
+                </a:solidFill>
+                <a:latin typeface="Calibri"/>
+              </a:rPr>
+              <a:t>Your turn</a:t>
+            </a:r>
+          </a:p>
+        </p:txBody>
+      </p:sp>
+      <p:sp>
+        <p:nvSpPr>
+          <p:cNvPr id="3" name="TextBox 2"/>
+          <p:cNvSpPr txBox="1"/>
+          <p:nvPr/>
+        </p:nvSpPr>
+        <p:spPr>
+          <a:xfrm>
+            <a:off x="548640" y="1234440"/>
+            <a:ext cx="11064240" cy="4937760"/>
+          </a:xfrm>
+          <a:prstGeom prst="rect">
+            <a:avLst/>
+          </a:prstGeom>
+          <a:noFill/>
+        </p:spPr>
+        <p:txBody>
+          <a:bodyPr wrap="square">
+            <a:noAutofit/>
+          </a:bodyPr>
+          <a:lstStyle/>
+          <a:p>
+            <a:pPr lvl="0" marL="457200" indent="-228600">
+              <a:buFont typeface="Calibri"/>
+              <a:spcAft>
+                <a:spcPts val="1000"/>
+              </a:spcAft>
+              <a:buSzPct val="100000"/>
+              <a:buChar char="•"/>
+              <a:lnSpc>
+                <a:spcPts val="2200"/>
+              </a:lnSpc>
+            </a:pPr>
+            <a:r>
+              <a:rPr sz="2000" b="0">
+                <a:solidFill>
+                  <a:srgbClr val="333333"/>
+                </a:solidFill>
+                <a:latin typeface="Calibri"/>
+              </a:rPr>
+              <a:t>Accept the AB | CDE packing</a:t>
+            </a:r>
+          </a:p>
+          <a:p>
+            <a:pPr lvl="0" marL="457200" indent="-228600">
+              <a:buFont typeface="Calibri"/>
+              <a:spcAft>
+                <a:spcPts val="1000"/>
+              </a:spcAft>
+              <a:buSzPct val="100000"/>
+              <a:buChar char="•"/>
+              <a:lnSpc>
+                <a:spcPts val="2200"/>
+              </a:lnSpc>
+            </a:pPr>
+            <a:r>
+              <a:rPr sz="2000" b="0">
+                <a:solidFill>
+                  <a:srgbClr val="333333"/>
+                </a:solidFill>
+                <a:latin typeface="Calibri"/>
+              </a:rPr>
+              <a:t>Next: assign pins P0 through P3 on all four outline sides</a:t>
+            </a:r>
+          </a:p>
+        </p:txBody>
+      </p:sp>
+      <p:sp>
+        <p:nvSpPr>
+          <p:cNvPr id="4" name="TextBox 3"/>
           <p:cNvSpPr txBox="1"/>
           <p:nvPr/>
         </p:nvSpPr>
@@ -4015,21 +4474,45 @@
                 </a:solidFill>
                 <a:latin typeface="Calibri"/>
               </a:rPr>
-              <a:t>The idea</a:t>
-            </a:r>
-          </a:p>
-        </p:txBody>
-      </p:sp>
-      <p:sp>
-        <p:nvSpPr>
-          <p:cNvPr id="3" name="TextBox 2"/>
+              <a:t>Two clusters: AB and CDE</a:t>
+            </a:r>
+          </a:p>
+        </p:txBody>
+      </p:sp>
+      <p:pic>
+        <p:nvPicPr>
+          <p:cNvPr id="3" name="Picture 2" descr="01-clusters.png"/>
+          <p:cNvPicPr>
+            <a:picLocks noChangeAspect="1"/>
+          </p:cNvPicPr>
+          <p:nvPr/>
+        </p:nvPicPr>
+        <p:blipFill>
+          <a:blip r:embed="rId2"/>
+          <a:stretch>
+            <a:fillRect/>
+          </a:stretch>
+        </p:blipFill>
+        <p:spPr>
+          <a:xfrm>
+            <a:off x="548640" y="1143000"/>
+            <a:ext cx="9424736" cy="4572000"/>
+          </a:xfrm>
+          <a:prstGeom prst="rect">
+            <a:avLst/>
+          </a:prstGeom>
+        </p:spPr>
+      </p:pic>
+      <p:sp>
+        <p:nvSpPr>
+          <p:cNvPr id="4" name="TextBox 3"/>
           <p:cNvSpPr txBox="1"/>
           <p:nvPr/>
         </p:nvSpPr>
         <p:spPr>
           <a:xfrm>
-            <a:off x="548640" y="1234440"/>
-            <a:ext cx="11064240" cy="4937760"/>
+            <a:off x="548640" y="5897880"/>
+            <a:ext cx="11064240" cy="411480"/>
           </a:xfrm>
           <a:prstGeom prst="rect">
             <a:avLst/>
@@ -4042,120 +4525,26 @@
           </a:bodyPr>
           <a:lstStyle/>
           <a:p>
-            <a:pPr lvl="0" marL="457200" indent="-228600">
-              <a:buFont typeface="Calibri"/>
-              <a:spcAft>
-                <a:spcPts val="1000"/>
-              </a:spcAft>
-              <a:buSzPct val="100000"/>
-              <a:buChar char="•"/>
+            <a:pPr>
               <a:lnSpc>
                 <a:spcPts val="2200"/>
               </a:lnSpc>
             </a:pPr>
             <a:r>
-              <a:rPr sz="2000" b="0">
+              <a:rPr sz="1200" b="0">
                 <a:solidFill>
                   <a:srgbClr val="333333"/>
                 </a:solidFill>
                 <a:latin typeface="Calibri"/>
               </a:rPr>
-              <a:t>Pick a parent region inside the outline</a:t>
-            </a:r>
-          </a:p>
-          <a:p>
-            <a:pPr lvl="0" marL="457200" indent="-228600">
-              <a:buFont typeface="Calibri"/>
-              <a:spcAft>
-                <a:spcPts val="1000"/>
-              </a:spcAft>
-              <a:buSzPct val="100000"/>
-              <a:buChar char="•"/>
-              <a:lnSpc>
-                <a:spcPts val="2200"/>
-              </a:lnSpc>
-            </a:pPr>
-            <a:r>
-              <a:rPr sz="2000" b="0">
-                <a:solidFill>
-                  <a:srgbClr val="333333"/>
-                </a:solidFill>
-                <a:latin typeface="Calibri"/>
-              </a:rPr>
-              <a:t>Floorplan a subset of modules inside that region as if it were its own fixed outline</a:t>
-            </a:r>
-          </a:p>
-          <a:p>
-            <a:pPr lvl="0" marL="457200" indent="-228600">
-              <a:buFont typeface="Calibri"/>
-              <a:spcAft>
-                <a:spcPts val="1000"/>
-              </a:spcAft>
-              <a:buSzPct val="100000"/>
-              <a:buChar char="•"/>
-              <a:lnSpc>
-                <a:spcPts val="2200"/>
-              </a:lnSpc>
-            </a:pPr>
-            <a:r>
-              <a:rPr sz="2000" b="0">
-                <a:solidFill>
-                  <a:srgbClr val="333333"/>
-                </a:solidFill>
-                <a:latin typeface="Calibri"/>
-              </a:rPr>
-              <a:t>Place sibling regions, then recurse</a:t>
-            </a:r>
-          </a:p>
-          <a:p>
-            <a:pPr lvl="0" marL="457200" indent="-228600">
-              <a:buFont typeface="Calibri"/>
-              <a:spcAft>
-                <a:spcPts val="1000"/>
-              </a:spcAft>
-              <a:buSzPct val="100000"/>
-              <a:buChar char="•"/>
-              <a:lnSpc>
-                <a:spcPts val="2200"/>
-              </a:lnSpc>
-            </a:pPr>
-            <a:r>
-              <a:rPr sz="2000" b="0">
-                <a:solidFill>
-                  <a:srgbClr val="333333"/>
-                </a:solidFill>
-                <a:latin typeface="Calibri"/>
-              </a:rPr>
-              <a:t>Top-level deadspace still uses the chip outline area</a:t>
-            </a:r>
-          </a:p>
-          <a:p>
-            <a:pPr lvl="0" marL="457200" indent="-228600">
-              <a:buFont typeface="Calibri"/>
-              <a:spcAft>
-                <a:spcPts val="1000"/>
-              </a:spcAft>
-              <a:buSzPct val="100000"/>
-              <a:buChar char="•"/>
-              <a:lnSpc>
-                <a:spcPts val="2200"/>
-              </a:lnSpc>
-            </a:pPr>
-            <a:r>
-              <a:rPr sz="2000" b="0">
-                <a:solidFill>
-                  <a:srgbClr val="333333"/>
-                </a:solidFill>
-                <a:latin typeface="Calibri"/>
-              </a:rPr>
-              <a:t>Keep region outlines legal with respect to their parent</a:t>
-            </a:r>
-          </a:p>
-        </p:txBody>
-      </p:sp>
-      <p:sp>
-        <p:nvSpPr>
-          <p:cNvPr id="4" name="TextBox 3"/>
+              <a:t>Two clusters: AB and CDE</a:t>
+            </a:r>
+          </a:p>
+        </p:txBody>
+      </p:sp>
+      <p:sp>
+        <p:nvSpPr>
+          <p:cNvPr id="5" name="TextBox 4"/>
           <p:cNvSpPr txBox="1"/>
           <p:nvPr/>
         </p:nvSpPr>
@@ -4244,21 +4633,45 @@
                 </a:solidFill>
                 <a:latin typeface="Calibri"/>
               </a:rPr>
-              <a:t>Browser lab track</a:t>
-            </a:r>
-          </a:p>
-        </p:txBody>
-      </p:sp>
-      <p:sp>
-        <p:nvSpPr>
-          <p:cNvPr id="3" name="TextBox 2"/>
+              <a:t>Left cluster packs at x&lt;5</a:t>
+            </a:r>
+          </a:p>
+        </p:txBody>
+      </p:sp>
+      <p:pic>
+        <p:nvPicPr>
+          <p:cNvPr id="3" name="Picture 2" descr="02-left.png"/>
+          <p:cNvPicPr>
+            <a:picLocks noChangeAspect="1"/>
+          </p:cNvPicPr>
+          <p:nvPr/>
+        </p:nvPicPr>
+        <p:blipFill>
+          <a:blip r:embed="rId2"/>
+          <a:stretch>
+            <a:fillRect/>
+          </a:stretch>
+        </p:blipFill>
+        <p:spPr>
+          <a:xfrm>
+            <a:off x="548640" y="1143000"/>
+            <a:ext cx="9424736" cy="4572000"/>
+          </a:xfrm>
+          <a:prstGeom prst="rect">
+            <a:avLst/>
+          </a:prstGeom>
+        </p:spPr>
+      </p:pic>
+      <p:sp>
+        <p:nvSpPr>
+          <p:cNvPr id="4" name="TextBox 3"/>
           <p:cNvSpPr txBox="1"/>
           <p:nvPr/>
         </p:nvSpPr>
         <p:spPr>
           <a:xfrm>
-            <a:off x="548640" y="1234440"/>
-            <a:ext cx="11064240" cy="4937760"/>
+            <a:off x="548640" y="5897880"/>
+            <a:ext cx="11064240" cy="411480"/>
           </a:xfrm>
           <a:prstGeom prst="rect">
             <a:avLst/>
@@ -4271,129 +4684,26 @@
           </a:bodyPr>
           <a:lstStyle/>
           <a:p>
-            <a:pPr lvl="0" marL="457200" indent="-228600">
-              <a:buFont typeface="Calibri"/>
-              <a:spcAft>
-                <a:spcPts val="1000"/>
-              </a:spcAft>
-              <a:buSzPct val="100000"/>
-              <a:buChar char="•"/>
+            <a:pPr>
               <a:lnSpc>
                 <a:spcPts val="2200"/>
               </a:lnSpc>
             </a:pPr>
             <a:r>
-              <a:rPr sz="2000" b="0">
+              <a:rPr sz="1200" b="0">
                 <a:solidFill>
                   <a:srgbClr val="333333"/>
                 </a:solidFill>
                 <a:latin typeface="Calibri"/>
               </a:rPr>
-              <a:t>Open </a:t>
-            </a:r>
-            <a:r>
-              <a:rPr sz="2000" b="1">
-                <a:solidFill>
-                  <a:srgbClr val="333333"/>
-                </a:solidFill>
-                <a:latin typeface="Calibri"/>
-              </a:rPr>
-              <a:t>hierarchical-floorplan</a:t>
-            </a:r>
-          </a:p>
-          <a:p>
-            <a:pPr lvl="0" marL="457200" indent="-228600">
-              <a:buFont typeface="Calibri"/>
-              <a:spcAft>
-                <a:spcPts val="1000"/>
-              </a:spcAft>
-              <a:buSzPct val="100000"/>
-              <a:buChar char="•"/>
-              <a:lnSpc>
-                <a:spcPts val="2200"/>
-              </a:lnSpc>
-            </a:pPr>
-            <a:r>
-              <a:rPr sz="2000" b="0">
-                <a:solidFill>
-                  <a:srgbClr val="333333"/>
-                </a:solidFill>
-                <a:latin typeface="Calibri"/>
-              </a:rPr>
-              <a:t>Load a two-level starter: a parent outline and two child groups</a:t>
-            </a:r>
-          </a:p>
-          <a:p>
-            <a:pPr lvl="0" marL="457200" indent="-228600">
-              <a:buFont typeface="Calibri"/>
-              <a:spcAft>
-                <a:spcPts val="1000"/>
-              </a:spcAft>
-              <a:buSzPct val="100000"/>
-              <a:buChar char="•"/>
-              <a:lnSpc>
-                <a:spcPts val="2200"/>
-              </a:lnSpc>
-            </a:pPr>
-            <a:r>
-              <a:rPr sz="2000" b="0">
-                <a:solidFill>
-                  <a:srgbClr val="333333"/>
-                </a:solidFill>
-                <a:latin typeface="Calibri"/>
-              </a:rPr>
-              <a:t>Pack inside each child, then place children in the parent</a:t>
-            </a:r>
-          </a:p>
-          <a:p>
-            <a:pPr lvl="0" marL="457200" indent="-228600">
-              <a:buFont typeface="Calibri"/>
-              <a:spcAft>
-                <a:spcPts val="1000"/>
-              </a:spcAft>
-              <a:buSzPct val="100000"/>
-              <a:buChar char="•"/>
-              <a:lnSpc>
-                <a:spcPts val="2200"/>
-              </a:lnSpc>
-            </a:pPr>
-            <a:r>
-              <a:rPr sz="2000" b="0">
-                <a:solidFill>
-                  <a:srgbClr val="333333"/>
-                </a:solidFill>
-                <a:latin typeface="Calibri"/>
-              </a:rPr>
-              <a:t>Inspect metrics at both levels</a:t>
-            </a:r>
-          </a:p>
-          <a:p>
-            <a:pPr lvl="0" marL="457200" indent="-228600">
-              <a:buFont typeface="Calibri"/>
-              <a:spcAft>
-                <a:spcPts val="1000"/>
-              </a:spcAft>
-              <a:buSzPct val="100000"/>
-              <a:buChar char="•"/>
-              <a:lnSpc>
-                <a:spcPts val="2200"/>
-              </a:lnSpc>
-            </a:pPr>
-            <a:r>
-              <a:rPr sz="2000" b="0">
-                <a:solidFill>
-                  <a:srgbClr val="333333"/>
-                </a:solidFill>
-                <a:latin typeface="Calibri"/>
-              </a:rPr>
-              <a:t>Then implement nested packing in Track A</a:t>
-            </a:r>
-          </a:p>
-        </p:txBody>
-      </p:sp>
-      <p:sp>
-        <p:nvSpPr>
-          <p:cNvPr id="4" name="TextBox 3"/>
+              <a:t>Left cluster packs at x&lt;5</a:t>
+            </a:r>
+          </a:p>
+        </p:txBody>
+      </p:sp>
+      <p:sp>
+        <p:nvSpPr>
+          <p:cNvPr id="5" name="TextBox 4"/>
           <p:cNvSpPr txBox="1"/>
           <p:nvPr/>
         </p:nvSpPr>
@@ -4482,21 +4792,45 @@
                 </a:solidFill>
                 <a:latin typeface="Calibri"/>
               </a:rPr>
-              <a:t>Implement track</a:t>
-            </a:r>
-          </a:p>
-        </p:txBody>
-      </p:sp>
-      <p:sp>
-        <p:nvSpPr>
-          <p:cNvPr id="3" name="TextBox 2"/>
+              <a:t>Right cluster offsets by 5</a:t>
+            </a:r>
+          </a:p>
+        </p:txBody>
+      </p:sp>
+      <p:pic>
+        <p:nvPicPr>
+          <p:cNvPr id="3" name="Picture 2" descr="03-right.png"/>
+          <p:cNvPicPr>
+            <a:picLocks noChangeAspect="1"/>
+          </p:cNvPicPr>
+          <p:nvPr/>
+        </p:nvPicPr>
+        <p:blipFill>
+          <a:blip r:embed="rId2"/>
+          <a:stretch>
+            <a:fillRect/>
+          </a:stretch>
+        </p:blipFill>
+        <p:spPr>
+          <a:xfrm>
+            <a:off x="548640" y="1143000"/>
+            <a:ext cx="9424736" cy="4572000"/>
+          </a:xfrm>
+          <a:prstGeom prst="rect">
+            <a:avLst/>
+          </a:prstGeom>
+        </p:spPr>
+      </p:pic>
+      <p:sp>
+        <p:nvSpPr>
+          <p:cNvPr id="4" name="TextBox 3"/>
           <p:cNvSpPr txBox="1"/>
           <p:nvPr/>
         </p:nvSpPr>
         <p:spPr>
           <a:xfrm>
-            <a:off x="548640" y="1234440"/>
-            <a:ext cx="11064240" cy="4937760"/>
+            <a:off x="548640" y="5897880"/>
+            <a:ext cx="11064240" cy="411480"/>
           </a:xfrm>
           <a:prstGeom prst="rect">
             <a:avLst/>
@@ -4509,98 +4843,26 @@
           </a:bodyPr>
           <a:lstStyle/>
           <a:p>
-            <a:pPr lvl="0" marL="457200" indent="-228600">
-              <a:buFont typeface="Calibri"/>
-              <a:spcAft>
-                <a:spcPts val="1000"/>
-              </a:spcAft>
-              <a:buSzPct val="100000"/>
-              <a:buChar char="•"/>
+            <a:pPr>
               <a:lnSpc>
                 <a:spcPts val="2200"/>
               </a:lnSpc>
             </a:pPr>
             <a:r>
-              <a:rPr sz="2000" b="0">
+              <a:rPr sz="1200" b="0">
                 <a:solidFill>
                   <a:srgbClr val="333333"/>
                 </a:solidFill>
                 <a:latin typeface="Calibri"/>
               </a:rPr>
-              <a:t>Partition A–E into two groups</a:t>
-            </a:r>
-          </a:p>
-          <a:p>
-            <a:pPr lvl="0" marL="457200" indent="-228600">
-              <a:buFont typeface="Calibri"/>
-              <a:spcAft>
-                <a:spcPts val="1000"/>
-              </a:spcAft>
-              <a:buSzPct val="100000"/>
-              <a:buChar char="•"/>
-              <a:lnSpc>
-                <a:spcPts val="2200"/>
-              </a:lnSpc>
-            </a:pPr>
-            <a:r>
-              <a:rPr sz="2000" b="0">
-                <a:solidFill>
-                  <a:srgbClr val="333333"/>
-                </a:solidFill>
-                <a:latin typeface="Calibri"/>
-              </a:rPr>
-              <a:t>Floorplan each group into a sub-rectangle</a:t>
-            </a:r>
-          </a:p>
-          <a:p>
-            <a:pPr lvl="0" marL="457200" indent="-228600">
-              <a:buFont typeface="Calibri"/>
-              <a:spcAft>
-                <a:spcPts val="1000"/>
-              </a:spcAft>
-              <a:buSzPct val="100000"/>
-              <a:buChar char="•"/>
-              <a:lnSpc>
-                <a:spcPts val="2200"/>
-              </a:lnSpc>
-            </a:pPr>
-            <a:r>
-              <a:rPr sz="2000" b="0">
-                <a:solidFill>
-                  <a:srgbClr val="333333"/>
-                </a:solidFill>
-                <a:latin typeface="Calibri"/>
-              </a:rPr>
-              <a:t>Verify no group overflows its region and regions don’t overlap</a:t>
-            </a:r>
-          </a:p>
-          <a:p>
-            <a:pPr lvl="0" marL="457200" indent="-228600">
-              <a:buFont typeface="Calibri"/>
-              <a:spcAft>
-                <a:spcPts val="1000"/>
-              </a:spcAft>
-              <a:buSzPct val="100000"/>
-              <a:buChar char="•"/>
-              <a:lnSpc>
-                <a:spcPts val="2200"/>
-              </a:lnSpc>
-            </a:pPr>
-            <a:r>
-              <a:rPr sz="2000" b="0">
-                <a:solidFill>
-                  <a:srgbClr val="333333"/>
-                </a:solidFill>
-                <a:latin typeface="Calibri"/>
-              </a:rPr>
-              <a:t>Report global deadspace</a:t>
-            </a:r>
-          </a:p>
-        </p:txBody>
-      </p:sp>
-      <p:sp>
-        <p:nvSpPr>
-          <p:cNvPr id="4" name="TextBox 3"/>
+              <a:t>Right cluster offsets by 5</a:t>
+            </a:r>
+          </a:p>
+        </p:txBody>
+      </p:sp>
+      <p:sp>
+        <p:nvSpPr>
+          <p:cNvPr id="5" name="TextBox 4"/>
           <p:cNvSpPr txBox="1"/>
           <p:nvPr/>
         </p:nvSpPr>
@@ -4689,21 +4951,45 @@
                 </a:solidFill>
                 <a:latin typeface="Calibri"/>
               </a:rPr>
-              <a:t>Pitfalls</a:t>
-            </a:r>
-          </a:p>
-        </p:txBody>
-      </p:sp>
-      <p:sp>
-        <p:nvSpPr>
-          <p:cNvPr id="3" name="TextBox 2"/>
+              <a:t>Hierarchy is legal overall</a:t>
+            </a:r>
+          </a:p>
+        </p:txBody>
+      </p:sp>
+      <p:pic>
+        <p:nvPicPr>
+          <p:cNvPr id="3" name="Picture 2" descr="04-legal.png"/>
+          <p:cNvPicPr>
+            <a:picLocks noChangeAspect="1"/>
+          </p:cNvPicPr>
+          <p:nvPr/>
+        </p:nvPicPr>
+        <p:blipFill>
+          <a:blip r:embed="rId2"/>
+          <a:stretch>
+            <a:fillRect/>
+          </a:stretch>
+        </p:blipFill>
+        <p:spPr>
+          <a:xfrm>
+            <a:off x="548640" y="1143000"/>
+            <a:ext cx="9424736" cy="4572000"/>
+          </a:xfrm>
+          <a:prstGeom prst="rect">
+            <a:avLst/>
+          </a:prstGeom>
+        </p:spPr>
+      </p:pic>
+      <p:sp>
+        <p:nvSpPr>
+          <p:cNvPr id="4" name="TextBox 3"/>
           <p:cNvSpPr txBox="1"/>
           <p:nvPr/>
         </p:nvSpPr>
         <p:spPr>
           <a:xfrm>
-            <a:off x="548640" y="1234440"/>
-            <a:ext cx="11064240" cy="4937760"/>
+            <a:off x="548640" y="5897880"/>
+            <a:ext cx="11064240" cy="411480"/>
           </a:xfrm>
           <a:prstGeom prst="rect">
             <a:avLst/>
@@ -4716,76 +5002,26 @@
           </a:bodyPr>
           <a:lstStyle/>
           <a:p>
-            <a:pPr lvl="0" marL="457200" indent="-228600">
-              <a:buFont typeface="Calibri"/>
-              <a:spcAft>
-                <a:spcPts val="1000"/>
-              </a:spcAft>
-              <a:buSzPct val="100000"/>
-              <a:buChar char="•"/>
+            <a:pPr>
               <a:lnSpc>
                 <a:spcPts val="2200"/>
               </a:lnSpc>
             </a:pPr>
             <a:r>
-              <a:rPr sz="2000" b="0">
+              <a:rPr sz="1200" b="0">
                 <a:solidFill>
                   <a:srgbClr val="333333"/>
                 </a:solidFill>
                 <a:latin typeface="Calibri"/>
               </a:rPr>
-              <a:t>Optimizing children while ignoring parent legality leaves you with beautiful</a:t>
-            </a:r>
-          </a:p>
-          <a:p>
-            <a:pPr lvl="0" marL="457200" indent="-228600">
-              <a:buFont typeface="Calibri"/>
-              <a:spcAft>
-                <a:spcPts val="1000"/>
-              </a:spcAft>
-              <a:buSzPct val="100000"/>
-              <a:buChar char="•"/>
-              <a:lnSpc>
-                <a:spcPts val="2200"/>
-              </a:lnSpc>
-            </a:pPr>
-            <a:r>
-              <a:rPr sz="2000" b="0">
-                <a:solidFill>
-                  <a:srgbClr val="333333"/>
-                </a:solidFill>
-                <a:latin typeface="Calibri"/>
-              </a:rPr>
-              <a:t>Don’t double-count module area across levels</a:t>
-            </a:r>
-          </a:p>
-          <a:p>
-            <a:pPr lvl="0" marL="457200" indent="-228600">
-              <a:buFont typeface="Calibri"/>
-              <a:spcAft>
-                <a:spcPts val="1000"/>
-              </a:spcAft>
-              <a:buSzPct val="100000"/>
-              <a:buChar char="•"/>
-              <a:lnSpc>
-                <a:spcPts val="2200"/>
-              </a:lnSpc>
-            </a:pPr>
-            <a:r>
-              <a:rPr sz="2000" b="0">
-                <a:solidFill>
-                  <a:srgbClr val="333333"/>
-                </a:solidFill>
-                <a:latin typeface="Calibri"/>
-              </a:rPr>
-              <a:t>Align coordinates to a single global origin when composing</a:t>
-            </a:r>
-          </a:p>
-        </p:txBody>
-      </p:sp>
-      <p:sp>
-        <p:nvSpPr>
-          <p:cNvPr id="4" name="TextBox 3"/>
+              <a:t>Hierarchy is legal overall</a:t>
+            </a:r>
+          </a:p>
+        </p:txBody>
+      </p:sp>
+      <p:sp>
+        <p:nvSpPr>
+          <p:cNvPr id="5" name="TextBox 4"/>
           <p:cNvSpPr txBox="1"/>
           <p:nvPr/>
         </p:nvSpPr>
@@ -4874,7 +5110,166 @@
                 </a:solidFill>
                 <a:latin typeface="Calibri"/>
               </a:rPr>
-              <a:t>Your turn</a:t>
+              <a:t>Hierarchy reuses the same engines</a:t>
+            </a:r>
+          </a:p>
+        </p:txBody>
+      </p:sp>
+      <p:pic>
+        <p:nvPicPr>
+          <p:cNvPr id="3" name="Picture 2" descr="05-takeaway.png"/>
+          <p:cNvPicPr>
+            <a:picLocks noChangeAspect="1"/>
+          </p:cNvPicPr>
+          <p:nvPr/>
+        </p:nvPicPr>
+        <p:blipFill>
+          <a:blip r:embed="rId2"/>
+          <a:stretch>
+            <a:fillRect/>
+          </a:stretch>
+        </p:blipFill>
+        <p:spPr>
+          <a:xfrm>
+            <a:off x="548640" y="1143000"/>
+            <a:ext cx="9424736" cy="4572000"/>
+          </a:xfrm>
+          <a:prstGeom prst="rect">
+            <a:avLst/>
+          </a:prstGeom>
+        </p:spPr>
+      </p:pic>
+      <p:sp>
+        <p:nvSpPr>
+          <p:cNvPr id="4" name="TextBox 3"/>
+          <p:cNvSpPr txBox="1"/>
+          <p:nvPr/>
+        </p:nvSpPr>
+        <p:spPr>
+          <a:xfrm>
+            <a:off x="548640" y="5897880"/>
+            <a:ext cx="11064240" cy="411480"/>
+          </a:xfrm>
+          <a:prstGeom prst="rect">
+            <a:avLst/>
+          </a:prstGeom>
+          <a:noFill/>
+        </p:spPr>
+        <p:txBody>
+          <a:bodyPr wrap="square">
+            <a:noAutofit/>
+          </a:bodyPr>
+          <a:lstStyle/>
+          <a:p>
+            <a:pPr>
+              <a:lnSpc>
+                <a:spcPts val="2200"/>
+              </a:lnSpc>
+            </a:pPr>
+            <a:r>
+              <a:rPr sz="1200" b="0">
+                <a:solidFill>
+                  <a:srgbClr val="333333"/>
+                </a:solidFill>
+                <a:latin typeface="Calibri"/>
+              </a:rPr>
+              <a:t>Hierarchy reuses the same engines</a:t>
+            </a:r>
+          </a:p>
+        </p:txBody>
+      </p:sp>
+      <p:sp>
+        <p:nvSpPr>
+          <p:cNvPr id="5" name="TextBox 4"/>
+          <p:cNvSpPr txBox="1"/>
+          <p:nvPr/>
+        </p:nvSpPr>
+        <p:spPr>
+          <a:xfrm>
+            <a:off x="548640" y="6355080"/>
+            <a:ext cx="11064240" cy="320040"/>
+          </a:xfrm>
+          <a:prstGeom prst="rect">
+            <a:avLst/>
+          </a:prstGeom>
+          <a:noFill/>
+        </p:spPr>
+        <p:txBody>
+          <a:bodyPr wrap="square">
+            <a:noAutofit/>
+          </a:bodyPr>
+          <a:lstStyle/>
+          <a:p>
+            <a:pPr algn="r">
+              <a:lnSpc>
+                <a:spcPts val="2200"/>
+              </a:lnSpc>
+              <a:defRPr sz="1000" b="0">
+                <a:solidFill>
+                  <a:srgbClr val="666666"/>
+                </a:solidFill>
+                <a:latin typeface="Calibri"/>
+              </a:defRPr>
+            </a:pPr>
+            <a:r>
+              <a:t>learn_floorplanning — 01 hierarchical floorplan</a:t>
+            </a:r>
+          </a:p>
+        </p:txBody>
+      </p:sp>
+    </p:spTree>
+  </p:cSld>
+  <p:clrMapOvr>
+    <a:masterClrMapping/>
+  </p:clrMapOvr>
+</p:sld>
+</file>
+
+<file path=ppt/slides/slide7.xml><?xml version="1.0" encoding="utf-8"?>
+<p:sld xmlns:a="http://schemas.openxmlformats.org/drawingml/2006/main" xmlns:p="http://schemas.openxmlformats.org/presentationml/2006/main" xmlns:r="http://schemas.openxmlformats.org/officeDocument/2006/relationships">
+  <p:cSld>
+    <p:spTree>
+      <p:nvGrpSpPr>
+        <p:cNvPr id="1" name=""/>
+        <p:cNvGrpSpPr/>
+        <p:nvPr/>
+      </p:nvGrpSpPr>
+      <p:grpSpPr/>
+      <p:sp>
+        <p:nvSpPr>
+          <p:cNvPr id="2" name="TextBox 1"/>
+          <p:cNvSpPr txBox="1"/>
+          <p:nvPr/>
+        </p:nvSpPr>
+        <p:spPr>
+          <a:xfrm>
+            <a:off x="548640" y="411480"/>
+            <a:ext cx="11064240" cy="777240"/>
+          </a:xfrm>
+          <a:prstGeom prst="rect">
+            <a:avLst/>
+          </a:prstGeom>
+          <a:noFill/>
+        </p:spPr>
+        <p:txBody>
+          <a:bodyPr wrap="square">
+            <a:noAutofit/>
+          </a:bodyPr>
+          <a:lstStyle/>
+          <a:p>
+            <a:pPr>
+              <a:lnSpc>
+                <a:spcPts val="2200"/>
+              </a:lnSpc>
+            </a:pPr>
+            <a:r>
+              <a:rPr sz="2800" b="1">
+                <a:solidFill>
+                  <a:srgbClr val="1A1A2E"/>
+                </a:solidFill>
+                <a:latin typeface="Calibri"/>
+              </a:rPr>
+              <a:t>Browser lab track</a:t>
             </a:r>
           </a:p>
         </p:txBody>
@@ -4919,7 +5314,7 @@
                 </a:solidFill>
                 <a:latin typeface="Calibri"/>
               </a:rPr>
-              <a:t>Ship one hierarchical packing for the tiny instance</a:t>
+              <a:t>Open hierarchical-floorplan and Pack hierarchy</a:t>
             </a:r>
           </a:p>
           <a:p>
@@ -4941,7 +5336,311 @@
                 </a:solidFill>
                 <a:latin typeface="Calibri"/>
               </a:rPr>
-              <a:t>Next: assign I/O pins to the chip boundary</a:t>
+              <a:t>Confirm A and B have x less than five, C D E have x at least five, and legality true</a:t>
+            </a:r>
+          </a:p>
+        </p:txBody>
+      </p:sp>
+      <p:sp>
+        <p:nvSpPr>
+          <p:cNvPr id="4" name="TextBox 3"/>
+          <p:cNvSpPr txBox="1"/>
+          <p:nvPr/>
+        </p:nvSpPr>
+        <p:spPr>
+          <a:xfrm>
+            <a:off x="548640" y="6355080"/>
+            <a:ext cx="11064240" cy="320040"/>
+          </a:xfrm>
+          <a:prstGeom prst="rect">
+            <a:avLst/>
+          </a:prstGeom>
+          <a:noFill/>
+        </p:spPr>
+        <p:txBody>
+          <a:bodyPr wrap="square">
+            <a:noAutofit/>
+          </a:bodyPr>
+          <a:lstStyle/>
+          <a:p>
+            <a:pPr algn="r">
+              <a:lnSpc>
+                <a:spcPts val="2200"/>
+              </a:lnSpc>
+              <a:defRPr sz="1000" b="0">
+                <a:solidFill>
+                  <a:srgbClr val="666666"/>
+                </a:solidFill>
+                <a:latin typeface="Calibri"/>
+              </a:defRPr>
+            </a:pPr>
+            <a:r>
+              <a:t>learn_floorplanning — 01 hierarchical floorplan</a:t>
+            </a:r>
+          </a:p>
+        </p:txBody>
+      </p:sp>
+    </p:spTree>
+  </p:cSld>
+  <p:clrMapOvr>
+    <a:masterClrMapping/>
+  </p:clrMapOvr>
+</p:sld>
+</file>
+
+<file path=ppt/slides/slide8.xml><?xml version="1.0" encoding="utf-8"?>
+<p:sld xmlns:a="http://schemas.openxmlformats.org/drawingml/2006/main" xmlns:p="http://schemas.openxmlformats.org/presentationml/2006/main" xmlns:r="http://schemas.openxmlformats.org/officeDocument/2006/relationships">
+  <p:cSld>
+    <p:spTree>
+      <p:nvGrpSpPr>
+        <p:cNvPr id="1" name=""/>
+        <p:cNvGrpSpPr/>
+        <p:nvPr/>
+      </p:nvGrpSpPr>
+      <p:grpSpPr/>
+      <p:sp>
+        <p:nvSpPr>
+          <p:cNvPr id="2" name="TextBox 1"/>
+          <p:cNvSpPr txBox="1"/>
+          <p:nvPr/>
+        </p:nvSpPr>
+        <p:spPr>
+          <a:xfrm>
+            <a:off x="548640" y="411480"/>
+            <a:ext cx="11064240" cy="777240"/>
+          </a:xfrm>
+          <a:prstGeom prst="rect">
+            <a:avLst/>
+          </a:prstGeom>
+          <a:noFill/>
+        </p:spPr>
+        <p:txBody>
+          <a:bodyPr wrap="square">
+            <a:noAutofit/>
+          </a:bodyPr>
+          <a:lstStyle/>
+          <a:p>
+            <a:pPr>
+              <a:lnSpc>
+                <a:spcPts val="2200"/>
+              </a:lnSpc>
+            </a:pPr>
+            <a:r>
+              <a:rPr sz="2800" b="1">
+                <a:solidFill>
+                  <a:srgbClr val="1A1A2E"/>
+                </a:solidFill>
+                <a:latin typeface="Calibri"/>
+              </a:rPr>
+              <a:t>Implement track</a:t>
+            </a:r>
+          </a:p>
+        </p:txBody>
+      </p:sp>
+      <p:sp>
+        <p:nvSpPr>
+          <p:cNvPr id="3" name="TextBox 2"/>
+          <p:cNvSpPr txBox="1"/>
+          <p:nvPr/>
+        </p:nvSpPr>
+        <p:spPr>
+          <a:xfrm>
+            <a:off x="548640" y="1234440"/>
+            <a:ext cx="11064240" cy="4937760"/>
+          </a:xfrm>
+          <a:prstGeom prst="rect">
+            <a:avLst/>
+          </a:prstGeom>
+          <a:noFill/>
+        </p:spPr>
+        <p:txBody>
+          <a:bodyPr wrap="square">
+            <a:noAutofit/>
+          </a:bodyPr>
+          <a:lstStyle/>
+          <a:p>
+            <a:pPr lvl="0" marL="457200" indent="-228600">
+              <a:buFont typeface="Calibri"/>
+              <a:spcAft>
+                <a:spcPts val="1000"/>
+              </a:spcAft>
+              <a:buSzPct val="100000"/>
+              <a:buChar char="•"/>
+              <a:lnSpc>
+                <a:spcPts val="2200"/>
+              </a:lnSpc>
+            </a:pPr>
+            <a:r>
+              <a:rPr sz="2000" b="0">
+                <a:solidFill>
+                  <a:srgbClr val="333333"/>
+                </a:solidFill>
+                <a:latin typeface="Calibri"/>
+              </a:rPr>
+              <a:t>Implement pack_hierarchical</a:t>
+            </a:r>
+          </a:p>
+          <a:p>
+            <a:pPr lvl="0" marL="457200" indent="-228600">
+              <a:buFont typeface="Calibri"/>
+              <a:spcAft>
+                <a:spcPts val="1000"/>
+              </a:spcAft>
+              <a:buSzPct val="100000"/>
+              <a:buChar char="•"/>
+              <a:lnSpc>
+                <a:spcPts val="2200"/>
+              </a:lnSpc>
+            </a:pPr>
+            <a:r>
+              <a:rPr sz="2000" b="0">
+                <a:solidFill>
+                  <a:srgbClr val="333333"/>
+                </a:solidFill>
+                <a:latin typeface="Calibri"/>
+              </a:rPr>
+              <a:t>Assert leftMax x+w is at most rightMin x, five modules present, and legality true</a:t>
+            </a:r>
+          </a:p>
+        </p:txBody>
+      </p:sp>
+      <p:sp>
+        <p:nvSpPr>
+          <p:cNvPr id="4" name="TextBox 3"/>
+          <p:cNvSpPr txBox="1"/>
+          <p:nvPr/>
+        </p:nvSpPr>
+        <p:spPr>
+          <a:xfrm>
+            <a:off x="548640" y="6355080"/>
+            <a:ext cx="11064240" cy="320040"/>
+          </a:xfrm>
+          <a:prstGeom prst="rect">
+            <a:avLst/>
+          </a:prstGeom>
+          <a:noFill/>
+        </p:spPr>
+        <p:txBody>
+          <a:bodyPr wrap="square">
+            <a:noAutofit/>
+          </a:bodyPr>
+          <a:lstStyle/>
+          <a:p>
+            <a:pPr algn="r">
+              <a:lnSpc>
+                <a:spcPts val="2200"/>
+              </a:lnSpc>
+              <a:defRPr sz="1000" b="0">
+                <a:solidFill>
+                  <a:srgbClr val="666666"/>
+                </a:solidFill>
+                <a:latin typeface="Calibri"/>
+              </a:defRPr>
+            </a:pPr>
+            <a:r>
+              <a:t>learn_floorplanning — 01 hierarchical floorplan</a:t>
+            </a:r>
+          </a:p>
+        </p:txBody>
+      </p:sp>
+    </p:spTree>
+  </p:cSld>
+  <p:clrMapOvr>
+    <a:masterClrMapping/>
+  </p:clrMapOvr>
+</p:sld>
+</file>
+
+<file path=ppt/slides/slide9.xml><?xml version="1.0" encoding="utf-8"?>
+<p:sld xmlns:a="http://schemas.openxmlformats.org/drawingml/2006/main" xmlns:p="http://schemas.openxmlformats.org/presentationml/2006/main" xmlns:r="http://schemas.openxmlformats.org/officeDocument/2006/relationships">
+  <p:cSld>
+    <p:spTree>
+      <p:nvGrpSpPr>
+        <p:cNvPr id="1" name=""/>
+        <p:cNvGrpSpPr/>
+        <p:nvPr/>
+      </p:nvGrpSpPr>
+      <p:grpSpPr/>
+      <p:sp>
+        <p:nvSpPr>
+          <p:cNvPr id="2" name="TextBox 1"/>
+          <p:cNvSpPr txBox="1"/>
+          <p:nvPr/>
+        </p:nvSpPr>
+        <p:spPr>
+          <a:xfrm>
+            <a:off x="548640" y="411480"/>
+            <a:ext cx="11064240" cy="777240"/>
+          </a:xfrm>
+          <a:prstGeom prst="rect">
+            <a:avLst/>
+          </a:prstGeom>
+          <a:noFill/>
+        </p:spPr>
+        <p:txBody>
+          <a:bodyPr wrap="square">
+            <a:noAutofit/>
+          </a:bodyPr>
+          <a:lstStyle/>
+          <a:p>
+            <a:pPr>
+              <a:lnSpc>
+                <a:spcPts val="2200"/>
+              </a:lnSpc>
+            </a:pPr>
+            <a:r>
+              <a:rPr sz="2800" b="1">
+                <a:solidFill>
+                  <a:srgbClr val="1A1A2E"/>
+                </a:solidFill>
+                <a:latin typeface="Calibri"/>
+              </a:rPr>
+              <a:t>Pitfalls</a:t>
+            </a:r>
+          </a:p>
+        </p:txBody>
+      </p:sp>
+      <p:sp>
+        <p:nvSpPr>
+          <p:cNvPr id="3" name="TextBox 2"/>
+          <p:cNvSpPr txBox="1"/>
+          <p:nvPr/>
+        </p:nvSpPr>
+        <p:spPr>
+          <a:xfrm>
+            <a:off x="548640" y="1234440"/>
+            <a:ext cx="11064240" cy="4937760"/>
+          </a:xfrm>
+          <a:prstGeom prst="rect">
+            <a:avLst/>
+          </a:prstGeom>
+          <a:noFill/>
+        </p:spPr>
+        <p:txBody>
+          <a:bodyPr wrap="square">
+            <a:noAutofit/>
+          </a:bodyPr>
+          <a:lstStyle/>
+          <a:p>
+            <a:pPr lvl="0" marL="457200" indent="-228600">
+              <a:buFont typeface="Calibri"/>
+              <a:spcAft>
+                <a:spcPts val="1000"/>
+              </a:spcAft>
+              <a:buSzPct val="100000"/>
+              <a:buChar char="•"/>
+              <a:lnSpc>
+                <a:spcPts val="2200"/>
+              </a:lnSpc>
+            </a:pPr>
+            <a:r>
+              <a:rPr sz="2000" b="0">
+                <a:solidFill>
+                  <a:srgbClr val="333333"/>
+                </a:solidFill>
+                <a:latin typeface="Calibri"/>
+              </a:rPr>
+              <a:t>Overlapping cluster bounding boxes</a:t>
             </a:r>
           </a:p>
         </p:txBody>

--- a/courses/learn_floorplanning/module04-01-hierarchical-floorplan/slides.pptx
+++ b/courses/learn_floorplanning/module04-01-hierarchical-floorplan/slides.pptx
@@ -15,6 +15,9 @@
     <p:sldId id="263" r:id="rId15"/>
     <p:sldId id="264" r:id="rId16"/>
     <p:sldId id="265" r:id="rId17"/>
+    <p:sldId id="266" r:id="rId18"/>
+    <p:sldId id="267" r:id="rId19"/>
+    <p:sldId id="268" r:id="rId20"/>
   </p:sldIdLst>
   <p:sldSz cx="12191695" cy="6858000" type="screen4x3"/>
   <p:notesSz cx="6858000" cy="9144000"/>
@@ -514,12 +517,6 @@
               <a:t>Hierarchy packs cluster AB on the left and cluster CDE on the right with x offset five. Local pack, then place clusters—legal overall with clusters separated in x.</a:t>
             </a:r>
           </a:p>
-          <a:p/>
-          <a:p>
-            <a:r>
-              <a:t>&lt;!-- algorithm-walkthrough --&gt;</a:t>
-            </a:r>
-          </a:p>
         </p:txBody>
       </p:sp>
       <p:sp>
@@ -587,6 +584,146 @@
           <a:lstStyle/>
           <a:p>
             <a:r>
+              <a:t>Implement pack_hierarchical. Assert leftMax x+w is at most rightMin x, five modules present, and legality true.</a:t>
+            </a:r>
+          </a:p>
+        </p:txBody>
+      </p:sp>
+      <p:sp>
+        <p:nvSpPr>
+          <p:cNvPr id="4" name="Slide Number Placeholder 3"/>
+          <p:cNvSpPr>
+            <a:spLocks noGrp="1"/>
+          </p:cNvSpPr>
+          <p:nvPr>
+            <p:ph type="sldNum" idx="5" sz="quarter"/>
+          </p:nvPr>
+        </p:nvSpPr>
+        <p:spPr/>
+      </p:sp>
+    </p:spTree>
+  </p:cSld>
+  <p:clrMapOvr>
+    <a:masterClrMapping/>
+  </p:clrMapOvr>
+</p:notes>
+</file>
+
+<file path=ppt/notesSlides/notesSlide11.xml><?xml version="1.0" encoding="utf-8"?>
+<p:notes xmlns:a="http://schemas.openxmlformats.org/drawingml/2006/main" xmlns:p="http://schemas.openxmlformats.org/presentationml/2006/main" xmlns:r="http://schemas.openxmlformats.org/officeDocument/2006/relationships">
+  <p:cSld>
+    <p:spTree>
+      <p:nvGrpSpPr>
+        <p:cNvPr id="1" name=""/>
+        <p:cNvGrpSpPr/>
+        <p:nvPr/>
+      </p:nvGrpSpPr>
+      <p:grpSpPr>
+        <a:xfrm>
+          <a:off x="0" y="0"/>
+          <a:ext cx="0" cy="0"/>
+          <a:chOff x="0" y="0"/>
+          <a:chExt cx="0" cy="0"/>
+        </a:xfrm>
+      </p:grpSpPr>
+      <p:sp>
+        <p:nvSpPr>
+          <p:cNvPr id="2" name="Slide Image Placeholder 1"/>
+          <p:cNvSpPr>
+            <a:spLocks noGrp="1"/>
+          </p:cNvSpPr>
+          <p:nvPr>
+            <p:ph type="sldImg" idx="2"/>
+          </p:nvPr>
+        </p:nvSpPr>
+        <p:spPr/>
+      </p:sp>
+      <p:sp>
+        <p:nvSpPr>
+          <p:cNvPr id="3" name="Notes Placeholder 2"/>
+          <p:cNvSpPr>
+            <a:spLocks noGrp="1"/>
+          </p:cNvSpPr>
+          <p:nvPr>
+            <p:ph type="body" idx="3" sz="quarter"/>
+          </p:nvPr>
+        </p:nvSpPr>
+        <p:spPr/>
+        <p:txBody>
+          <a:bodyPr/>
+          <a:lstStyle/>
+          <a:p>
+            <a:r>
+              <a:t>Overlapping cluster bounding boxes; forgetting the offset; applying different legality rules at each level.</a:t>
+            </a:r>
+          </a:p>
+        </p:txBody>
+      </p:sp>
+      <p:sp>
+        <p:nvSpPr>
+          <p:cNvPr id="4" name="Slide Number Placeholder 3"/>
+          <p:cNvSpPr>
+            <a:spLocks noGrp="1"/>
+          </p:cNvSpPr>
+          <p:nvPr>
+            <p:ph type="sldNum" idx="5" sz="quarter"/>
+          </p:nvPr>
+        </p:nvSpPr>
+        <p:spPr/>
+      </p:sp>
+    </p:spTree>
+  </p:cSld>
+  <p:clrMapOvr>
+    <a:masterClrMapping/>
+  </p:clrMapOvr>
+</p:notes>
+</file>
+
+<file path=ppt/notesSlides/notesSlide12.xml><?xml version="1.0" encoding="utf-8"?>
+<p:notes xmlns:a="http://schemas.openxmlformats.org/drawingml/2006/main" xmlns:p="http://schemas.openxmlformats.org/presentationml/2006/main" xmlns:r="http://schemas.openxmlformats.org/officeDocument/2006/relationships">
+  <p:cSld>
+    <p:spTree>
+      <p:nvGrpSpPr>
+        <p:cNvPr id="1" name=""/>
+        <p:cNvGrpSpPr/>
+        <p:nvPr/>
+      </p:nvGrpSpPr>
+      <p:grpSpPr>
+        <a:xfrm>
+          <a:off x="0" y="0"/>
+          <a:ext cx="0" cy="0"/>
+          <a:chOff x="0" y="0"/>
+          <a:chExt cx="0" cy="0"/>
+        </a:xfrm>
+      </p:grpSpPr>
+      <p:sp>
+        <p:nvSpPr>
+          <p:cNvPr id="2" name="Slide Image Placeholder 1"/>
+          <p:cNvSpPr>
+            <a:spLocks noGrp="1"/>
+          </p:cNvSpPr>
+          <p:nvPr>
+            <p:ph type="sldImg" idx="2"/>
+          </p:nvPr>
+        </p:nvSpPr>
+        <p:spPr/>
+      </p:sp>
+      <p:sp>
+        <p:nvSpPr>
+          <p:cNvPr id="3" name="Notes Placeholder 2"/>
+          <p:cNvSpPr>
+            <a:spLocks noGrp="1"/>
+          </p:cNvSpPr>
+          <p:nvPr>
+            <p:ph type="body" idx="3" sz="quarter"/>
+          </p:nvPr>
+        </p:nvSpPr>
+        <p:spPr/>
+        <p:txBody>
+          <a:bodyPr/>
+          <a:lstStyle/>
+          <a:p>
+            <a:r>
               <a:t>Accept the AB | CDE packing. Next: assign pins P0 through P3 on all four outline sides.</a:t>
             </a:r>
           </a:p>
@@ -657,7 +794,13 @@
           <a:lstStyle/>
           <a:p>
             <a:r>
-              <a:t>Hierarchy packs locally first. Left cluster holds A and B; right cluster holds C, D, and E. Each cluster is a mini-floorplan.</a:t>
+              <a:t>Hierarchical floorplan packs inside clusters first, then packs the cluster bounding boxes in the outline.</a:t>
+            </a:r>
+          </a:p>
+          <a:p/>
+          <a:p>
+            <a:r>
+              <a:t>Open this module's examples file and find the Pseudocode section. That written sketch is what you implement on the implement track and what the browser challenges measure.</a:t>
             </a:r>
           </a:p>
         </p:txBody>
@@ -727,7 +870,7 @@
           <a:lstStyle/>
           <a:p>
             <a:r>
-              <a:t>AB occupies the left side with A at the origin and B at x equals three. Everything in this cluster stays left of x equals five.</a:t>
+              <a:t>Teaching golden places cluster A B on the left and C D E on the right starting at x equals five.</a:t>
             </a:r>
           </a:p>
         </p:txBody>
@@ -797,7 +940,7 @@
           <a:lstStyle/>
           <a:p>
             <a:r>
-              <a:t>CDE packs in local coordinates, then shifts by five in x. C, D, and E all land at x greater than or equal to five—no cluster overlap.</a:t>
+              <a:t>Hierarchy packs locally first. Left cluster holds A and B; right cluster holds C, D, and E. Each cluster is a mini-floorplan.</a:t>
             </a:r>
           </a:p>
         </p:txBody>
@@ -867,7 +1010,7 @@
           <a:lstStyle/>
           <a:p>
             <a:r>
-              <a:t>Placing the two cluster bounding boxes yields a legal chip packing. Hierarchy scales: recurse inside clusters, then assemble.</a:t>
+              <a:t>AB occupies the left side with A at the origin and B at x equals three. Everything in this cluster stays left of x equals five.</a:t>
             </a:r>
           </a:p>
         </p:txBody>
@@ -937,13 +1080,7 @@
           <a:lstStyle/>
           <a:p>
             <a:r>
-              <a:t>Each level can use slicing, B-star, or SA. The teaching golden is simply AB left and CDE right at offset five.</a:t>
-            </a:r>
-          </a:p>
-          <a:p/>
-          <a:p>
-            <a:r>
-              <a:t>&lt;!-- /algorithm-walkthrough --&gt;</a:t>
+              <a:t>CDE packs in local coordinates, then shifts by five in x. C, D, and E all land at x greater than or equal to five—no cluster overlap.</a:t>
             </a:r>
           </a:p>
         </p:txBody>
@@ -1013,7 +1150,7 @@
           <a:lstStyle/>
           <a:p>
             <a:r>
-              <a:t>Open hierarchical-floorplan and Pack hierarchy. Confirm A and B have x less than five, C D E have x at least five, and legality true.</a:t>
+              <a:t>Placing the two cluster bounding boxes yields a legal chip packing. Hierarchy scales: recurse inside clusters, then assemble.</a:t>
             </a:r>
           </a:p>
         </p:txBody>
@@ -1083,7 +1220,7 @@
           <a:lstStyle/>
           <a:p>
             <a:r>
-              <a:t>Implement pack_hierarchical. Assert leftMax x+w is at most rightMin x, five modules present, and legality true.</a:t>
+              <a:t>Each level can use slicing, B-star, or SA. The teaching golden is simply AB left and CDE right at offset five.</a:t>
             </a:r>
           </a:p>
         </p:txBody>
@@ -1153,7 +1290,7 @@
           <a:lstStyle/>
           <a:p>
             <a:r>
-              <a:t>Overlapping cluster bounding boxes; forgetting the offset; applying different legality rules at each level.</a:t>
+              <a:t>Open hierarchical-floorplan and Pack hierarchy. Confirm A and B have x less than five, C D E have x at least five, and legality true.</a:t>
             </a:r>
           </a:p>
         </p:txBody>
@@ -4311,6 +4448,473 @@
                 </a:solidFill>
                 <a:latin typeface="Calibri"/>
               </a:rPr>
+              <a:t>Browser lab track</a:t>
+            </a:r>
+          </a:p>
+        </p:txBody>
+      </p:sp>
+      <p:sp>
+        <p:nvSpPr>
+          <p:cNvPr id="3" name="TextBox 2"/>
+          <p:cNvSpPr txBox="1"/>
+          <p:nvPr/>
+        </p:nvSpPr>
+        <p:spPr>
+          <a:xfrm>
+            <a:off x="548640" y="1234440"/>
+            <a:ext cx="11064240" cy="4937760"/>
+          </a:xfrm>
+          <a:prstGeom prst="rect">
+            <a:avLst/>
+          </a:prstGeom>
+          <a:noFill/>
+        </p:spPr>
+        <p:txBody>
+          <a:bodyPr wrap="square">
+            <a:noAutofit/>
+          </a:bodyPr>
+          <a:lstStyle/>
+          <a:p>
+            <a:pPr lvl="0" marL="457200" indent="-228600">
+              <a:buFont typeface="Calibri"/>
+              <a:spcAft>
+                <a:spcPts val="1000"/>
+              </a:spcAft>
+              <a:buSzPct val="100000"/>
+              <a:buChar char="•"/>
+              <a:lnSpc>
+                <a:spcPts val="2200"/>
+              </a:lnSpc>
+            </a:pPr>
+            <a:r>
+              <a:rPr sz="2000" b="0">
+                <a:solidFill>
+                  <a:srgbClr val="333333"/>
+                </a:solidFill>
+                <a:latin typeface="Calibri"/>
+              </a:rPr>
+              <a:t>Open hierarchical-floorplan and Pack hierarchy</a:t>
+            </a:r>
+          </a:p>
+          <a:p>
+            <a:pPr lvl="0" marL="457200" indent="-228600">
+              <a:buFont typeface="Calibri"/>
+              <a:spcAft>
+                <a:spcPts val="1000"/>
+              </a:spcAft>
+              <a:buSzPct val="100000"/>
+              <a:buChar char="•"/>
+              <a:lnSpc>
+                <a:spcPts val="2200"/>
+              </a:lnSpc>
+            </a:pPr>
+            <a:r>
+              <a:rPr sz="2000" b="0">
+                <a:solidFill>
+                  <a:srgbClr val="333333"/>
+                </a:solidFill>
+                <a:latin typeface="Calibri"/>
+              </a:rPr>
+              <a:t>Confirm A and B have x less than five, C D E have x at least five, and legality true</a:t>
+            </a:r>
+          </a:p>
+        </p:txBody>
+      </p:sp>
+      <p:sp>
+        <p:nvSpPr>
+          <p:cNvPr id="4" name="TextBox 3"/>
+          <p:cNvSpPr txBox="1"/>
+          <p:nvPr/>
+        </p:nvSpPr>
+        <p:spPr>
+          <a:xfrm>
+            <a:off x="548640" y="6355080"/>
+            <a:ext cx="11064240" cy="320040"/>
+          </a:xfrm>
+          <a:prstGeom prst="rect">
+            <a:avLst/>
+          </a:prstGeom>
+          <a:noFill/>
+        </p:spPr>
+        <p:txBody>
+          <a:bodyPr wrap="square">
+            <a:noAutofit/>
+          </a:bodyPr>
+          <a:lstStyle/>
+          <a:p>
+            <a:pPr algn="r">
+              <a:lnSpc>
+                <a:spcPts val="2200"/>
+              </a:lnSpc>
+              <a:defRPr sz="1000" b="0">
+                <a:solidFill>
+                  <a:srgbClr val="666666"/>
+                </a:solidFill>
+                <a:latin typeface="Calibri"/>
+              </a:defRPr>
+            </a:pPr>
+            <a:r>
+              <a:t>learn_floorplanning — 01 hierarchical floorplan</a:t>
+            </a:r>
+          </a:p>
+        </p:txBody>
+      </p:sp>
+    </p:spTree>
+  </p:cSld>
+  <p:clrMapOvr>
+    <a:masterClrMapping/>
+  </p:clrMapOvr>
+</p:sld>
+</file>
+
+<file path=ppt/slides/slide11.xml><?xml version="1.0" encoding="utf-8"?>
+<p:sld xmlns:a="http://schemas.openxmlformats.org/drawingml/2006/main" xmlns:p="http://schemas.openxmlformats.org/presentationml/2006/main" xmlns:r="http://schemas.openxmlformats.org/officeDocument/2006/relationships">
+  <p:cSld>
+    <p:spTree>
+      <p:nvGrpSpPr>
+        <p:cNvPr id="1" name=""/>
+        <p:cNvGrpSpPr/>
+        <p:nvPr/>
+      </p:nvGrpSpPr>
+      <p:grpSpPr/>
+      <p:sp>
+        <p:nvSpPr>
+          <p:cNvPr id="2" name="TextBox 1"/>
+          <p:cNvSpPr txBox="1"/>
+          <p:nvPr/>
+        </p:nvSpPr>
+        <p:spPr>
+          <a:xfrm>
+            <a:off x="548640" y="411480"/>
+            <a:ext cx="11064240" cy="777240"/>
+          </a:xfrm>
+          <a:prstGeom prst="rect">
+            <a:avLst/>
+          </a:prstGeom>
+          <a:noFill/>
+        </p:spPr>
+        <p:txBody>
+          <a:bodyPr wrap="square">
+            <a:noAutofit/>
+          </a:bodyPr>
+          <a:lstStyle/>
+          <a:p>
+            <a:pPr>
+              <a:lnSpc>
+                <a:spcPts val="2200"/>
+              </a:lnSpc>
+            </a:pPr>
+            <a:r>
+              <a:rPr sz="2800" b="1">
+                <a:solidFill>
+                  <a:srgbClr val="1A1A2E"/>
+                </a:solidFill>
+                <a:latin typeface="Calibri"/>
+              </a:rPr>
+              <a:t>Implement track</a:t>
+            </a:r>
+          </a:p>
+        </p:txBody>
+      </p:sp>
+      <p:sp>
+        <p:nvSpPr>
+          <p:cNvPr id="3" name="TextBox 2"/>
+          <p:cNvSpPr txBox="1"/>
+          <p:nvPr/>
+        </p:nvSpPr>
+        <p:spPr>
+          <a:xfrm>
+            <a:off x="548640" y="1234440"/>
+            <a:ext cx="11064240" cy="4937760"/>
+          </a:xfrm>
+          <a:prstGeom prst="rect">
+            <a:avLst/>
+          </a:prstGeom>
+          <a:noFill/>
+        </p:spPr>
+        <p:txBody>
+          <a:bodyPr wrap="square">
+            <a:noAutofit/>
+          </a:bodyPr>
+          <a:lstStyle/>
+          <a:p>
+            <a:pPr lvl="0" marL="457200" indent="-228600">
+              <a:buFont typeface="Calibri"/>
+              <a:spcAft>
+                <a:spcPts val="1000"/>
+              </a:spcAft>
+              <a:buSzPct val="100000"/>
+              <a:buChar char="•"/>
+              <a:lnSpc>
+                <a:spcPts val="2200"/>
+              </a:lnSpc>
+            </a:pPr>
+            <a:r>
+              <a:rPr sz="2000" b="0">
+                <a:solidFill>
+                  <a:srgbClr val="333333"/>
+                </a:solidFill>
+                <a:latin typeface="Calibri"/>
+              </a:rPr>
+              <a:t>Implement pack_hierarchical</a:t>
+            </a:r>
+          </a:p>
+          <a:p>
+            <a:pPr lvl="0" marL="457200" indent="-228600">
+              <a:buFont typeface="Calibri"/>
+              <a:spcAft>
+                <a:spcPts val="1000"/>
+              </a:spcAft>
+              <a:buSzPct val="100000"/>
+              <a:buChar char="•"/>
+              <a:lnSpc>
+                <a:spcPts val="2200"/>
+              </a:lnSpc>
+            </a:pPr>
+            <a:r>
+              <a:rPr sz="2000" b="0">
+                <a:solidFill>
+                  <a:srgbClr val="333333"/>
+                </a:solidFill>
+                <a:latin typeface="Calibri"/>
+              </a:rPr>
+              <a:t>Assert leftMax x+w is at most rightMin x, five modules present, and legality true</a:t>
+            </a:r>
+          </a:p>
+        </p:txBody>
+      </p:sp>
+      <p:sp>
+        <p:nvSpPr>
+          <p:cNvPr id="4" name="TextBox 3"/>
+          <p:cNvSpPr txBox="1"/>
+          <p:nvPr/>
+        </p:nvSpPr>
+        <p:spPr>
+          <a:xfrm>
+            <a:off x="548640" y="6355080"/>
+            <a:ext cx="11064240" cy="320040"/>
+          </a:xfrm>
+          <a:prstGeom prst="rect">
+            <a:avLst/>
+          </a:prstGeom>
+          <a:noFill/>
+        </p:spPr>
+        <p:txBody>
+          <a:bodyPr wrap="square">
+            <a:noAutofit/>
+          </a:bodyPr>
+          <a:lstStyle/>
+          <a:p>
+            <a:pPr algn="r">
+              <a:lnSpc>
+                <a:spcPts val="2200"/>
+              </a:lnSpc>
+              <a:defRPr sz="1000" b="0">
+                <a:solidFill>
+                  <a:srgbClr val="666666"/>
+                </a:solidFill>
+                <a:latin typeface="Calibri"/>
+              </a:defRPr>
+            </a:pPr>
+            <a:r>
+              <a:t>learn_floorplanning — 01 hierarchical floorplan</a:t>
+            </a:r>
+          </a:p>
+        </p:txBody>
+      </p:sp>
+    </p:spTree>
+  </p:cSld>
+  <p:clrMapOvr>
+    <a:masterClrMapping/>
+  </p:clrMapOvr>
+</p:sld>
+</file>
+
+<file path=ppt/slides/slide12.xml><?xml version="1.0" encoding="utf-8"?>
+<p:sld xmlns:a="http://schemas.openxmlformats.org/drawingml/2006/main" xmlns:p="http://schemas.openxmlformats.org/presentationml/2006/main" xmlns:r="http://schemas.openxmlformats.org/officeDocument/2006/relationships">
+  <p:cSld>
+    <p:spTree>
+      <p:nvGrpSpPr>
+        <p:cNvPr id="1" name=""/>
+        <p:cNvGrpSpPr/>
+        <p:nvPr/>
+      </p:nvGrpSpPr>
+      <p:grpSpPr/>
+      <p:sp>
+        <p:nvSpPr>
+          <p:cNvPr id="2" name="TextBox 1"/>
+          <p:cNvSpPr txBox="1"/>
+          <p:nvPr/>
+        </p:nvSpPr>
+        <p:spPr>
+          <a:xfrm>
+            <a:off x="548640" y="411480"/>
+            <a:ext cx="11064240" cy="777240"/>
+          </a:xfrm>
+          <a:prstGeom prst="rect">
+            <a:avLst/>
+          </a:prstGeom>
+          <a:noFill/>
+        </p:spPr>
+        <p:txBody>
+          <a:bodyPr wrap="square">
+            <a:noAutofit/>
+          </a:bodyPr>
+          <a:lstStyle/>
+          <a:p>
+            <a:pPr>
+              <a:lnSpc>
+                <a:spcPts val="2200"/>
+              </a:lnSpc>
+            </a:pPr>
+            <a:r>
+              <a:rPr sz="2800" b="1">
+                <a:solidFill>
+                  <a:srgbClr val="1A1A2E"/>
+                </a:solidFill>
+                <a:latin typeface="Calibri"/>
+              </a:rPr>
+              <a:t>Pitfalls</a:t>
+            </a:r>
+          </a:p>
+        </p:txBody>
+      </p:sp>
+      <p:sp>
+        <p:nvSpPr>
+          <p:cNvPr id="3" name="TextBox 2"/>
+          <p:cNvSpPr txBox="1"/>
+          <p:nvPr/>
+        </p:nvSpPr>
+        <p:spPr>
+          <a:xfrm>
+            <a:off x="548640" y="1234440"/>
+            <a:ext cx="11064240" cy="4937760"/>
+          </a:xfrm>
+          <a:prstGeom prst="rect">
+            <a:avLst/>
+          </a:prstGeom>
+          <a:noFill/>
+        </p:spPr>
+        <p:txBody>
+          <a:bodyPr wrap="square">
+            <a:noAutofit/>
+          </a:bodyPr>
+          <a:lstStyle/>
+          <a:p>
+            <a:pPr lvl="0" marL="457200" indent="-228600">
+              <a:buFont typeface="Calibri"/>
+              <a:spcAft>
+                <a:spcPts val="1000"/>
+              </a:spcAft>
+              <a:buSzPct val="100000"/>
+              <a:buChar char="•"/>
+              <a:lnSpc>
+                <a:spcPts val="2200"/>
+              </a:lnSpc>
+            </a:pPr>
+            <a:r>
+              <a:rPr sz="2000" b="0">
+                <a:solidFill>
+                  <a:srgbClr val="333333"/>
+                </a:solidFill>
+                <a:latin typeface="Calibri"/>
+              </a:rPr>
+              <a:t>Overlapping cluster bounding boxes</a:t>
+            </a:r>
+          </a:p>
+        </p:txBody>
+      </p:sp>
+      <p:sp>
+        <p:nvSpPr>
+          <p:cNvPr id="4" name="TextBox 3"/>
+          <p:cNvSpPr txBox="1"/>
+          <p:nvPr/>
+        </p:nvSpPr>
+        <p:spPr>
+          <a:xfrm>
+            <a:off x="548640" y="6355080"/>
+            <a:ext cx="11064240" cy="320040"/>
+          </a:xfrm>
+          <a:prstGeom prst="rect">
+            <a:avLst/>
+          </a:prstGeom>
+          <a:noFill/>
+        </p:spPr>
+        <p:txBody>
+          <a:bodyPr wrap="square">
+            <a:noAutofit/>
+          </a:bodyPr>
+          <a:lstStyle/>
+          <a:p>
+            <a:pPr algn="r">
+              <a:lnSpc>
+                <a:spcPts val="2200"/>
+              </a:lnSpc>
+              <a:defRPr sz="1000" b="0">
+                <a:solidFill>
+                  <a:srgbClr val="666666"/>
+                </a:solidFill>
+                <a:latin typeface="Calibri"/>
+              </a:defRPr>
+            </a:pPr>
+            <a:r>
+              <a:t>learn_floorplanning — 01 hierarchical floorplan</a:t>
+            </a:r>
+          </a:p>
+        </p:txBody>
+      </p:sp>
+    </p:spTree>
+  </p:cSld>
+  <p:clrMapOvr>
+    <a:masterClrMapping/>
+  </p:clrMapOvr>
+</p:sld>
+</file>
+
+<file path=ppt/slides/slide13.xml><?xml version="1.0" encoding="utf-8"?>
+<p:sld xmlns:a="http://schemas.openxmlformats.org/drawingml/2006/main" xmlns:p="http://schemas.openxmlformats.org/presentationml/2006/main" xmlns:r="http://schemas.openxmlformats.org/officeDocument/2006/relationships">
+  <p:cSld>
+    <p:spTree>
+      <p:nvGrpSpPr>
+        <p:cNvPr id="1" name=""/>
+        <p:cNvGrpSpPr/>
+        <p:nvPr/>
+      </p:nvGrpSpPr>
+      <p:grpSpPr/>
+      <p:sp>
+        <p:nvSpPr>
+          <p:cNvPr id="2" name="TextBox 1"/>
+          <p:cNvSpPr txBox="1"/>
+          <p:nvPr/>
+        </p:nvSpPr>
+        <p:spPr>
+          <a:xfrm>
+            <a:off x="548640" y="411480"/>
+            <a:ext cx="11064240" cy="777240"/>
+          </a:xfrm>
+          <a:prstGeom prst="rect">
+            <a:avLst/>
+          </a:prstGeom>
+          <a:noFill/>
+        </p:spPr>
+        <p:txBody>
+          <a:bodyPr wrap="square">
+            <a:noAutofit/>
+          </a:bodyPr>
+          <a:lstStyle/>
+          <a:p>
+            <a:pPr>
+              <a:lnSpc>
+                <a:spcPts val="2200"/>
+              </a:lnSpc>
+            </a:pPr>
+            <a:r>
+              <a:rPr sz="2800" b="1">
+                <a:solidFill>
+                  <a:srgbClr val="1A1A2E"/>
+                </a:solidFill>
+                <a:latin typeface="Calibri"/>
+              </a:rPr>
               <a:t>Your turn</a:t>
             </a:r>
           </a:p>
@@ -4474,45 +5078,21 @@
                 </a:solidFill>
                 <a:latin typeface="Calibri"/>
               </a:rPr>
-              <a:t>Two clusters: AB and CDE</a:t>
-            </a:r>
-          </a:p>
-        </p:txBody>
-      </p:sp>
-      <p:pic>
-        <p:nvPicPr>
-          <p:cNvPr id="3" name="Picture 2" descr="01-clusters.png"/>
-          <p:cNvPicPr>
-            <a:picLocks noChangeAspect="1"/>
-          </p:cNvPicPr>
-          <p:nvPr/>
-        </p:nvPicPr>
-        <p:blipFill>
-          <a:blip r:embed="rId2"/>
-          <a:stretch>
-            <a:fillRect/>
-          </a:stretch>
-        </p:blipFill>
-        <p:spPr>
-          <a:xfrm>
-            <a:off x="548640" y="1143000"/>
-            <a:ext cx="9424736" cy="4572000"/>
-          </a:xfrm>
-          <a:prstGeom prst="rect">
-            <a:avLst/>
-          </a:prstGeom>
-        </p:spPr>
-      </p:pic>
-      <p:sp>
-        <p:nvSpPr>
-          <p:cNvPr id="4" name="TextBox 3"/>
+              <a:t>Pseudocode</a:t>
+            </a:r>
+          </a:p>
+        </p:txBody>
+      </p:sp>
+      <p:sp>
+        <p:nvSpPr>
+          <p:cNvPr id="3" name="TextBox 2"/>
           <p:cNvSpPr txBox="1"/>
           <p:nvPr/>
         </p:nvSpPr>
         <p:spPr>
           <a:xfrm>
-            <a:off x="548640" y="5897880"/>
-            <a:ext cx="11064240" cy="411480"/>
+            <a:off x="548640" y="1234440"/>
+            <a:ext cx="11064240" cy="4937760"/>
           </a:xfrm>
           <a:prstGeom prst="rect">
             <a:avLst/>
@@ -4525,26 +5105,76 @@
           </a:bodyPr>
           <a:lstStyle/>
           <a:p>
-            <a:pPr>
+            <a:pPr lvl="0" marL="457200" indent="-228600">
+              <a:buFont typeface="Calibri"/>
+              <a:spcAft>
+                <a:spcPts val="1000"/>
+              </a:spcAft>
+              <a:buSzPct val="100000"/>
+              <a:buChar char="•"/>
               <a:lnSpc>
                 <a:spcPts val="2200"/>
               </a:lnSpc>
             </a:pPr>
             <a:r>
-              <a:rPr sz="1200" b="0">
+              <a:rPr sz="2000" b="0">
                 <a:solidFill>
                   <a:srgbClr val="333333"/>
                 </a:solidFill>
                 <a:latin typeface="Calibri"/>
               </a:rPr>
-              <a:t>Two clusters: AB and CDE</a:t>
-            </a:r>
-          </a:p>
-        </p:txBody>
-      </p:sp>
-      <p:sp>
-        <p:nvSpPr>
-          <p:cNvPr id="5" name="TextBox 4"/>
+              <a:t>Hierarchical floorplan packs inside clusters first</a:t>
+            </a:r>
+          </a:p>
+          <a:p>
+            <a:pPr lvl="0" marL="457200" indent="-228600">
+              <a:buFont typeface="Calibri"/>
+              <a:spcAft>
+                <a:spcPts val="1000"/>
+              </a:spcAft>
+              <a:buSzPct val="100000"/>
+              <a:buChar char="•"/>
+              <a:lnSpc>
+                <a:spcPts val="2200"/>
+              </a:lnSpc>
+            </a:pPr>
+            <a:r>
+              <a:rPr sz="2000" b="0">
+                <a:solidFill>
+                  <a:srgbClr val="333333"/>
+                </a:solidFill>
+                <a:latin typeface="Calibri"/>
+              </a:rPr>
+              <a:t>Open this module's examples file and find the Pseudocode section</a:t>
+            </a:r>
+          </a:p>
+          <a:p>
+            <a:pPr lvl="0" marL="457200" indent="-228600">
+              <a:buFont typeface="Calibri"/>
+              <a:spcAft>
+                <a:spcPts val="1000"/>
+              </a:spcAft>
+              <a:buSzPct val="100000"/>
+              <a:buChar char="•"/>
+              <a:lnSpc>
+                <a:spcPts val="2200"/>
+              </a:lnSpc>
+            </a:pPr>
+            <a:r>
+              <a:rPr sz="2000" b="0">
+                <a:solidFill>
+                  <a:srgbClr val="333333"/>
+                </a:solidFill>
+                <a:latin typeface="Calibri"/>
+              </a:rPr>
+              <a:t>That written sketch is what you implement on the implement track and what the browser</a:t>
+            </a:r>
+          </a:p>
+        </p:txBody>
+      </p:sp>
+      <p:sp>
+        <p:nvSpPr>
+          <p:cNvPr id="4" name="TextBox 3"/>
           <p:cNvSpPr txBox="1"/>
           <p:nvPr/>
         </p:nvSpPr>
@@ -4633,45 +5263,21 @@
                 </a:solidFill>
                 <a:latin typeface="Calibri"/>
               </a:rPr>
-              <a:t>Left cluster packs at x&lt;5</a:t>
-            </a:r>
-          </a:p>
-        </p:txBody>
-      </p:sp>
-      <p:pic>
-        <p:nvPicPr>
-          <p:cNvPr id="3" name="Picture 2" descr="02-left.png"/>
-          <p:cNvPicPr>
-            <a:picLocks noChangeAspect="1"/>
-          </p:cNvPicPr>
-          <p:nvPr/>
-        </p:nvPicPr>
-        <p:blipFill>
-          <a:blip r:embed="rId2"/>
-          <a:stretch>
-            <a:fillRect/>
-          </a:stretch>
-        </p:blipFill>
-        <p:spPr>
-          <a:xfrm>
-            <a:off x="548640" y="1143000"/>
-            <a:ext cx="9424736" cy="4572000"/>
-          </a:xfrm>
-          <a:prstGeom prst="rect">
-            <a:avLst/>
-          </a:prstGeom>
-        </p:spPr>
-      </p:pic>
-      <p:sp>
-        <p:nvSpPr>
-          <p:cNvPr id="4" name="TextBox 3"/>
+              <a:t>Algorithm sketch</a:t>
+            </a:r>
+          </a:p>
+        </p:txBody>
+      </p:sp>
+      <p:sp>
+        <p:nvSpPr>
+          <p:cNvPr id="3" name="TextBox 2"/>
           <p:cNvSpPr txBox="1"/>
           <p:nvPr/>
         </p:nvSpPr>
         <p:spPr>
           <a:xfrm>
-            <a:off x="548640" y="5897880"/>
-            <a:ext cx="11064240" cy="411480"/>
+            <a:off x="548640" y="1234440"/>
+            <a:ext cx="11064240" cy="4937760"/>
           </a:xfrm>
           <a:prstGeom prst="rect">
             <a:avLst/>
@@ -4684,26 +5290,32 @@
           </a:bodyPr>
           <a:lstStyle/>
           <a:p>
-            <a:pPr>
+            <a:pPr lvl="0" marL="457200" indent="-228600">
+              <a:buFont typeface="Calibri"/>
+              <a:spcAft>
+                <a:spcPts val="1000"/>
+              </a:spcAft>
+              <a:buSzPct val="100000"/>
+              <a:buChar char="•"/>
               <a:lnSpc>
                 <a:spcPts val="2200"/>
               </a:lnSpc>
             </a:pPr>
             <a:r>
-              <a:rPr sz="1200" b="0">
+              <a:rPr sz="2000" b="0">
                 <a:solidFill>
                   <a:srgbClr val="333333"/>
                 </a:solidFill>
                 <a:latin typeface="Calibri"/>
               </a:rPr>
-              <a:t>Left cluster packs at x&lt;5</a:t>
-            </a:r>
-          </a:p>
-        </p:txBody>
-      </p:sp>
-      <p:sp>
-        <p:nvSpPr>
-          <p:cNvPr id="5" name="TextBox 4"/>
+              <a:t>Teaching golden places cluster A B on the left and C D E on the right starting at x equals</a:t>
+            </a:r>
+          </a:p>
+        </p:txBody>
+      </p:sp>
+      <p:sp>
+        <p:nvSpPr>
+          <p:cNvPr id="4" name="TextBox 3"/>
           <p:cNvSpPr txBox="1"/>
           <p:nvPr/>
         </p:nvSpPr>
@@ -4792,50 +5404,28 @@
                 </a:solidFill>
                 <a:latin typeface="Calibri"/>
               </a:rPr>
-              <a:t>Right cluster offsets by 5</a:t>
-            </a:r>
-          </a:p>
-        </p:txBody>
-      </p:sp>
-      <p:pic>
-        <p:nvPicPr>
-          <p:cNvPr id="3" name="Picture 2" descr="03-right.png"/>
-          <p:cNvPicPr>
-            <a:picLocks noChangeAspect="1"/>
-          </p:cNvPicPr>
+              <a:t>Algorithm sketch — try these</a:t>
+            </a:r>
+          </a:p>
+        </p:txBody>
+      </p:sp>
+      <p:sp>
+        <p:nvSpPr>
+          <p:cNvPr id="3" name="TextBox 2"/>
+          <p:cNvSpPr txBox="1"/>
           <p:nvPr/>
-        </p:nvPicPr>
-        <p:blipFill>
-          <a:blip r:embed="rId2"/>
-          <a:stretch>
-            <a:fillRect/>
-          </a:stretch>
-        </p:blipFill>
+        </p:nvSpPr>
         <p:spPr>
           <a:xfrm>
             <a:off x="548640" y="1143000"/>
-            <a:ext cx="9424736" cy="4572000"/>
+            <a:ext cx="11064240" cy="5029200"/>
           </a:xfrm>
           <a:prstGeom prst="rect">
             <a:avLst/>
           </a:prstGeom>
-        </p:spPr>
-      </p:pic>
-      <p:sp>
-        <p:nvSpPr>
-          <p:cNvPr id="4" name="TextBox 3"/>
-          <p:cNvSpPr txBox="1"/>
-          <p:nvPr/>
-        </p:nvSpPr>
-        <p:spPr>
-          <a:xfrm>
-            <a:off x="548640" y="5897880"/>
-            <a:ext cx="11064240" cy="411480"/>
-          </a:xfrm>
-          <a:prstGeom prst="rect">
-            <a:avLst/>
-          </a:prstGeom>
-          <a:noFill/>
+          <a:solidFill>
+            <a:srgbClr val="F4F4F4"/>
+          </a:solidFill>
         </p:spPr>
         <p:txBody>
           <a:bodyPr wrap="square">
@@ -4847,22 +5437,101 @@
               <a:lnSpc>
                 <a:spcPts val="2200"/>
               </a:lnSpc>
+              <a:spcAft>
+                <a:spcPts val="400"/>
+              </a:spcAft>
             </a:pPr>
             <a:r>
-              <a:rPr sz="1200" b="0">
+              <a:rPr sz="2000" b="0">
                 <a:solidFill>
                   <a:srgbClr val="333333"/>
                 </a:solidFill>
-                <a:latin typeface="Calibri"/>
+                <a:latin typeface="Consolas"/>
               </a:rPr>
-              <a:t>Right cluster offsets by 5</a:t>
-            </a:r>
-          </a:p>
-        </p:txBody>
-      </p:sp>
-      <p:sp>
-        <p:nvSpPr>
-          <p:cNvPr id="5" name="TextBox 4"/>
+              <a:t>INPUT: clusters of modules</a:t>
+            </a:r>
+          </a:p>
+          <a:p>
+            <a:pPr>
+              <a:lnSpc>
+                <a:spcPts val="2200"/>
+              </a:lnSpc>
+              <a:spcAft>
+                <a:spcPts val="400"/>
+              </a:spcAft>
+            </a:pPr>
+            <a:r>
+              <a:rPr sz="2000" b="0">
+                <a:solidFill>
+                  <a:srgbClr val="333333"/>
+                </a:solidFill>
+                <a:latin typeface="Consolas"/>
+              </a:rPr>
+              <a:t>OUTPUT: top-level pack of cluster bboxes</a:t>
+            </a:r>
+          </a:p>
+          <a:p>
+            <a:pPr>
+              <a:lnSpc>
+                <a:spcPts val="2200"/>
+              </a:lnSpc>
+              <a:spcAft>
+                <a:spcPts val="400"/>
+              </a:spcAft>
+            </a:pPr>
+            <a:r>
+              <a:rPr sz="2000" b="0">
+                <a:solidFill>
+                  <a:srgbClr val="333333"/>
+                </a:solidFill>
+                <a:latin typeface="Consolas"/>
+              </a:rPr>
+              <a:t>pack each cluster internally (slice/B*/SA)</a:t>
+            </a:r>
+          </a:p>
+          <a:p>
+            <a:pPr>
+              <a:lnSpc>
+                <a:spcPts val="2200"/>
+              </a:lnSpc>
+              <a:spcAft>
+                <a:spcPts val="400"/>
+              </a:spcAft>
+            </a:pPr>
+            <a:r>
+              <a:rPr sz="2000" b="0">
+                <a:solidFill>
+                  <a:srgbClr val="333333"/>
+                </a:solidFill>
+                <a:latin typeface="Consolas"/>
+              </a:rPr>
+              <a:t>pack cluster bboxes in outline</a:t>
+            </a:r>
+          </a:p>
+          <a:p>
+            <a:pPr>
+              <a:lnSpc>
+                <a:spcPts val="2200"/>
+              </a:lnSpc>
+              <a:spcAft>
+                <a:spcPts val="400"/>
+              </a:spcAft>
+            </a:pPr>
+            <a:r>
+              <a:rPr sz="2000" b="0">
+                <a:solidFill>
+                  <a:srgbClr val="333333"/>
+                </a:solidFill>
+                <a:latin typeface="Consolas"/>
+              </a:rPr>
+              <a:t>GOLDEN teaching: AB left; CDE right @x=5</a:t>
+            </a:r>
+          </a:p>
+        </p:txBody>
+      </p:sp>
+      <p:sp>
+        <p:nvSpPr>
+          <p:cNvPr id="4" name="TextBox 3"/>
           <p:cNvSpPr txBox="1"/>
           <p:nvPr/>
         </p:nvSpPr>
@@ -4951,14 +5620,14 @@
                 </a:solidFill>
                 <a:latin typeface="Calibri"/>
               </a:rPr>
-              <a:t>Hierarchy is legal overall</a:t>
+              <a:t>Two clusters: AB and CDE</a:t>
             </a:r>
           </a:p>
         </p:txBody>
       </p:sp>
       <p:pic>
         <p:nvPicPr>
-          <p:cNvPr id="3" name="Picture 2" descr="04-legal.png"/>
+          <p:cNvPr id="3" name="Picture 2" descr="01-clusters.png"/>
           <p:cNvPicPr>
             <a:picLocks noChangeAspect="1"/>
           </p:cNvPicPr>
@@ -5014,7 +5683,7 @@
                 </a:solidFill>
                 <a:latin typeface="Calibri"/>
               </a:rPr>
-              <a:t>Hierarchy is legal overall</a:t>
+              <a:t>Two clusters: AB and CDE</a:t>
             </a:r>
           </a:p>
         </p:txBody>
@@ -5110,14 +5779,14 @@
                 </a:solidFill>
                 <a:latin typeface="Calibri"/>
               </a:rPr>
-              <a:t>Hierarchy reuses the same engines</a:t>
+              <a:t>Left cluster packs at x&lt;5</a:t>
             </a:r>
           </a:p>
         </p:txBody>
       </p:sp>
       <p:pic>
         <p:nvPicPr>
-          <p:cNvPr id="3" name="Picture 2" descr="05-takeaway.png"/>
+          <p:cNvPr id="3" name="Picture 2" descr="02-left.png"/>
           <p:cNvPicPr>
             <a:picLocks noChangeAspect="1"/>
           </p:cNvPicPr>
@@ -5173,7 +5842,7 @@
                 </a:solidFill>
                 <a:latin typeface="Calibri"/>
               </a:rPr>
-              <a:t>Hierarchy reuses the same engines</a:t>
+              <a:t>Left cluster packs at x&lt;5</a:t>
             </a:r>
           </a:p>
         </p:txBody>
@@ -5269,21 +5938,45 @@
                 </a:solidFill>
                 <a:latin typeface="Calibri"/>
               </a:rPr>
-              <a:t>Browser lab track</a:t>
-            </a:r>
-          </a:p>
-        </p:txBody>
-      </p:sp>
-      <p:sp>
-        <p:nvSpPr>
-          <p:cNvPr id="3" name="TextBox 2"/>
+              <a:t>Right cluster offsets by 5</a:t>
+            </a:r>
+          </a:p>
+        </p:txBody>
+      </p:sp>
+      <p:pic>
+        <p:nvPicPr>
+          <p:cNvPr id="3" name="Picture 2" descr="03-right.png"/>
+          <p:cNvPicPr>
+            <a:picLocks noChangeAspect="1"/>
+          </p:cNvPicPr>
+          <p:nvPr/>
+        </p:nvPicPr>
+        <p:blipFill>
+          <a:blip r:embed="rId2"/>
+          <a:stretch>
+            <a:fillRect/>
+          </a:stretch>
+        </p:blipFill>
+        <p:spPr>
+          <a:xfrm>
+            <a:off x="548640" y="1143000"/>
+            <a:ext cx="9424736" cy="4572000"/>
+          </a:xfrm>
+          <a:prstGeom prst="rect">
+            <a:avLst/>
+          </a:prstGeom>
+        </p:spPr>
+      </p:pic>
+      <p:sp>
+        <p:nvSpPr>
+          <p:cNvPr id="4" name="TextBox 3"/>
           <p:cNvSpPr txBox="1"/>
           <p:nvPr/>
         </p:nvSpPr>
         <p:spPr>
           <a:xfrm>
-            <a:off x="548640" y="1234440"/>
-            <a:ext cx="11064240" cy="4937760"/>
+            <a:off x="548640" y="5897880"/>
+            <a:ext cx="11064240" cy="411480"/>
           </a:xfrm>
           <a:prstGeom prst="rect">
             <a:avLst/>
@@ -5296,54 +5989,26 @@
           </a:bodyPr>
           <a:lstStyle/>
           <a:p>
-            <a:pPr lvl="0" marL="457200" indent="-228600">
-              <a:buFont typeface="Calibri"/>
-              <a:spcAft>
-                <a:spcPts val="1000"/>
-              </a:spcAft>
-              <a:buSzPct val="100000"/>
-              <a:buChar char="•"/>
+            <a:pPr>
               <a:lnSpc>
                 <a:spcPts val="2200"/>
               </a:lnSpc>
             </a:pPr>
             <a:r>
-              <a:rPr sz="2000" b="0">
+              <a:rPr sz="1200" b="0">
                 <a:solidFill>
                   <a:srgbClr val="333333"/>
                 </a:solidFill>
                 <a:latin typeface="Calibri"/>
               </a:rPr>
-              <a:t>Open hierarchical-floorplan and Pack hierarchy</a:t>
-            </a:r>
-          </a:p>
-          <a:p>
-            <a:pPr lvl="0" marL="457200" indent="-228600">
-              <a:buFont typeface="Calibri"/>
-              <a:spcAft>
-                <a:spcPts val="1000"/>
-              </a:spcAft>
-              <a:buSzPct val="100000"/>
-              <a:buChar char="•"/>
-              <a:lnSpc>
-                <a:spcPts val="2200"/>
-              </a:lnSpc>
-            </a:pPr>
-            <a:r>
-              <a:rPr sz="2000" b="0">
-                <a:solidFill>
-                  <a:srgbClr val="333333"/>
-                </a:solidFill>
-                <a:latin typeface="Calibri"/>
-              </a:rPr>
-              <a:t>Confirm A and B have x less than five, C D E have x at least five, and legality true</a:t>
-            </a:r>
-          </a:p>
-        </p:txBody>
-      </p:sp>
-      <p:sp>
-        <p:nvSpPr>
-          <p:cNvPr id="4" name="TextBox 3"/>
+              <a:t>Right cluster offsets by 5</a:t>
+            </a:r>
+          </a:p>
+        </p:txBody>
+      </p:sp>
+      <p:sp>
+        <p:nvSpPr>
+          <p:cNvPr id="5" name="TextBox 4"/>
           <p:cNvSpPr txBox="1"/>
           <p:nvPr/>
         </p:nvSpPr>
@@ -5432,21 +6097,45 @@
                 </a:solidFill>
                 <a:latin typeface="Calibri"/>
               </a:rPr>
-              <a:t>Implement track</a:t>
-            </a:r>
-          </a:p>
-        </p:txBody>
-      </p:sp>
-      <p:sp>
-        <p:nvSpPr>
-          <p:cNvPr id="3" name="TextBox 2"/>
+              <a:t>Hierarchy is legal overall</a:t>
+            </a:r>
+          </a:p>
+        </p:txBody>
+      </p:sp>
+      <p:pic>
+        <p:nvPicPr>
+          <p:cNvPr id="3" name="Picture 2" descr="04-legal.png"/>
+          <p:cNvPicPr>
+            <a:picLocks noChangeAspect="1"/>
+          </p:cNvPicPr>
+          <p:nvPr/>
+        </p:nvPicPr>
+        <p:blipFill>
+          <a:blip r:embed="rId2"/>
+          <a:stretch>
+            <a:fillRect/>
+          </a:stretch>
+        </p:blipFill>
+        <p:spPr>
+          <a:xfrm>
+            <a:off x="548640" y="1143000"/>
+            <a:ext cx="9424736" cy="4572000"/>
+          </a:xfrm>
+          <a:prstGeom prst="rect">
+            <a:avLst/>
+          </a:prstGeom>
+        </p:spPr>
+      </p:pic>
+      <p:sp>
+        <p:nvSpPr>
+          <p:cNvPr id="4" name="TextBox 3"/>
           <p:cNvSpPr txBox="1"/>
           <p:nvPr/>
         </p:nvSpPr>
         <p:spPr>
           <a:xfrm>
-            <a:off x="548640" y="1234440"/>
-            <a:ext cx="11064240" cy="4937760"/>
+            <a:off x="548640" y="5897880"/>
+            <a:ext cx="11064240" cy="411480"/>
           </a:xfrm>
           <a:prstGeom prst="rect">
             <a:avLst/>
@@ -5459,54 +6148,26 @@
           </a:bodyPr>
           <a:lstStyle/>
           <a:p>
-            <a:pPr lvl="0" marL="457200" indent="-228600">
-              <a:buFont typeface="Calibri"/>
-              <a:spcAft>
-                <a:spcPts val="1000"/>
-              </a:spcAft>
-              <a:buSzPct val="100000"/>
-              <a:buChar char="•"/>
+            <a:pPr>
               <a:lnSpc>
                 <a:spcPts val="2200"/>
               </a:lnSpc>
             </a:pPr>
             <a:r>
-              <a:rPr sz="2000" b="0">
+              <a:rPr sz="1200" b="0">
                 <a:solidFill>
                   <a:srgbClr val="333333"/>
                 </a:solidFill>
                 <a:latin typeface="Calibri"/>
               </a:rPr>
-              <a:t>Implement pack_hierarchical</a:t>
-            </a:r>
-          </a:p>
-          <a:p>
-            <a:pPr lvl="0" marL="457200" indent="-228600">
-              <a:buFont typeface="Calibri"/>
-              <a:spcAft>
-                <a:spcPts val="1000"/>
-              </a:spcAft>
-              <a:buSzPct val="100000"/>
-              <a:buChar char="•"/>
-              <a:lnSpc>
-                <a:spcPts val="2200"/>
-              </a:lnSpc>
-            </a:pPr>
-            <a:r>
-              <a:rPr sz="2000" b="0">
-                <a:solidFill>
-                  <a:srgbClr val="333333"/>
-                </a:solidFill>
-                <a:latin typeface="Calibri"/>
-              </a:rPr>
-              <a:t>Assert leftMax x+w is at most rightMin x, five modules present, and legality true</a:t>
-            </a:r>
-          </a:p>
-        </p:txBody>
-      </p:sp>
-      <p:sp>
-        <p:nvSpPr>
-          <p:cNvPr id="4" name="TextBox 3"/>
+              <a:t>Hierarchy is legal overall</a:t>
+            </a:r>
+          </a:p>
+        </p:txBody>
+      </p:sp>
+      <p:sp>
+        <p:nvSpPr>
+          <p:cNvPr id="5" name="TextBox 4"/>
           <p:cNvSpPr txBox="1"/>
           <p:nvPr/>
         </p:nvSpPr>
@@ -5595,21 +6256,45 @@
                 </a:solidFill>
                 <a:latin typeface="Calibri"/>
               </a:rPr>
-              <a:t>Pitfalls</a:t>
-            </a:r>
-          </a:p>
-        </p:txBody>
-      </p:sp>
-      <p:sp>
-        <p:nvSpPr>
-          <p:cNvPr id="3" name="TextBox 2"/>
+              <a:t>Hierarchy reuses the same engines</a:t>
+            </a:r>
+          </a:p>
+        </p:txBody>
+      </p:sp>
+      <p:pic>
+        <p:nvPicPr>
+          <p:cNvPr id="3" name="Picture 2" descr="05-takeaway.png"/>
+          <p:cNvPicPr>
+            <a:picLocks noChangeAspect="1"/>
+          </p:cNvPicPr>
+          <p:nvPr/>
+        </p:nvPicPr>
+        <p:blipFill>
+          <a:blip r:embed="rId2"/>
+          <a:stretch>
+            <a:fillRect/>
+          </a:stretch>
+        </p:blipFill>
+        <p:spPr>
+          <a:xfrm>
+            <a:off x="548640" y="1143000"/>
+            <a:ext cx="9424736" cy="4572000"/>
+          </a:xfrm>
+          <a:prstGeom prst="rect">
+            <a:avLst/>
+          </a:prstGeom>
+        </p:spPr>
+      </p:pic>
+      <p:sp>
+        <p:nvSpPr>
+          <p:cNvPr id="4" name="TextBox 3"/>
           <p:cNvSpPr txBox="1"/>
           <p:nvPr/>
         </p:nvSpPr>
         <p:spPr>
           <a:xfrm>
-            <a:off x="548640" y="1234440"/>
-            <a:ext cx="11064240" cy="4937760"/>
+            <a:off x="548640" y="5897880"/>
+            <a:ext cx="11064240" cy="411480"/>
           </a:xfrm>
           <a:prstGeom prst="rect">
             <a:avLst/>
@@ -5622,32 +6307,26 @@
           </a:bodyPr>
           <a:lstStyle/>
           <a:p>
-            <a:pPr lvl="0" marL="457200" indent="-228600">
-              <a:buFont typeface="Calibri"/>
-              <a:spcAft>
-                <a:spcPts val="1000"/>
-              </a:spcAft>
-              <a:buSzPct val="100000"/>
-              <a:buChar char="•"/>
+            <a:pPr>
               <a:lnSpc>
                 <a:spcPts val="2200"/>
               </a:lnSpc>
             </a:pPr>
             <a:r>
-              <a:rPr sz="2000" b="0">
+              <a:rPr sz="1200" b="0">
                 <a:solidFill>
                   <a:srgbClr val="333333"/>
                 </a:solidFill>
                 <a:latin typeface="Calibri"/>
               </a:rPr>
-              <a:t>Overlapping cluster bounding boxes</a:t>
-            </a:r>
-          </a:p>
-        </p:txBody>
-      </p:sp>
-      <p:sp>
-        <p:nvSpPr>
-          <p:cNvPr id="4" name="TextBox 3"/>
+              <a:t>Hierarchy reuses the same engines</a:t>
+            </a:r>
+          </a:p>
+        </p:txBody>
+      </p:sp>
+      <p:sp>
+        <p:nvSpPr>
+          <p:cNvPr id="5" name="TextBox 4"/>
           <p:cNvSpPr txBox="1"/>
           <p:nvPr/>
         </p:nvSpPr>
